--- a/modulo-01/01.08 - Descrevendo o Modelo de Programação ABAP RESTful (RAP)/01.08_O_modelo_de_programação_ABAP_RESTful_RAP.pptx
+++ b/modulo-01/01.08 - Descrevendo o Modelo de Programação ABAP RESTful (RAP)/01.08_O_modelo_de_programação_ABAP_RESTful_RAP.pptx
@@ -3598,7 +3598,7 @@
         <p:spPr>
           <a:xfrm>
             <a:off x="640080" y="1700784"/>
-            <a:ext cx="1842516" cy="292608"/>
+            <a:ext cx="1531620" cy="292608"/>
           </a:xfrm>
           <a:prstGeom prst="rect">
             <a:avLst/>
@@ -3618,7 +3618,7 @@
         <p:spPr>
           <a:xfrm>
             <a:off x="640080" y="1700784"/>
-            <a:ext cx="1842516" cy="27432"/>
+            <a:ext cx="1531620" cy="27432"/>
           </a:xfrm>
           <a:prstGeom prst="rect">
             <a:avLst/>
@@ -3638,7 +3638,7 @@
         <p:spPr>
           <a:xfrm>
             <a:off x="731520" y="1719072"/>
-            <a:ext cx="1659636" cy="274320"/>
+            <a:ext cx="1348740" cy="274320"/>
           </a:xfrm>
           <a:prstGeom prst="rect">
             <a:avLst/>
@@ -3659,7 +3659,7 @@
                   <a:srgbClr val="FFFFFF"/>
                 </a:solidFill>
               </a:rPr>
-              <a:t>z_r_connection.bdef</a:t>
+              <a:t>zr_pc_item.bdef</a:t>
             </a:r>
             <a:endParaRPr lang="en-US" sz="950" dirty="0"/>
           </a:p>
@@ -3695,7 +3695,7 @@
                   <a:srgbClr val="9DA5B4"/>
                 </a:solidFill>
               </a:rPr>
-              <a:t>ZS4D400_##_RAP › Z_R_CONNECTION</a:t>
+              <a:t>ZAVBS_PC_ESTOQUE › ZR_PC_ITEM (simplificada)</a:t>
             </a:r>
             <a:endParaRPr lang="en-US" sz="850" dirty="0"/>
           </a:p>
@@ -4041,6 +4041,46 @@
             </a:r>
             <a:endParaRPr lang="en-US" sz="1050" dirty="0"/>
           </a:p>
+          <a:p>
+            <a:pPr algn="r" indent="0" marL="0">
+              <a:lnSpc>
+                <a:spcPct val="105000"/>
+              </a:lnSpc>
+              <a:buNone/>
+            </a:pPr>
+            <a:r>
+              <a:rPr lang="en-US" sz="1050" dirty="0">
+                <a:solidFill>
+                  <a:srgbClr val="6E7681"/>
+                </a:solidFill>
+                <a:latin typeface="Courier New" pitchFamily="34" charset="0"/>
+                <a:ea typeface="Courier New" pitchFamily="34" charset="-122"/>
+                <a:cs typeface="Courier New" pitchFamily="34" charset="-120"/>
+              </a:rPr>
+              <a:t>17</a:t>
+            </a:r>
+            <a:endParaRPr lang="en-US" sz="1050" dirty="0"/>
+          </a:p>
+          <a:p>
+            <a:pPr algn="r" indent="0" marL="0">
+              <a:lnSpc>
+                <a:spcPct val="105000"/>
+              </a:lnSpc>
+              <a:buNone/>
+            </a:pPr>
+            <a:r>
+              <a:rPr lang="en-US" sz="1050" dirty="0">
+                <a:solidFill>
+                  <a:srgbClr val="6E7681"/>
+                </a:solidFill>
+                <a:latin typeface="Courier New" pitchFamily="34" charset="0"/>
+                <a:ea typeface="Courier New" pitchFamily="34" charset="-122"/>
+                <a:cs typeface="Courier New" pitchFamily="34" charset="-120"/>
+              </a:rPr>
+              <a:t>18</a:t>
+            </a:r>
+            <a:endParaRPr lang="en-US" sz="1050" dirty="0"/>
+          </a:p>
         </p:txBody>
       </p:sp>
       <p:sp>
@@ -4167,7 +4207,7 @@
                 <a:ea typeface="Courier New" pitchFamily="34" charset="-122"/>
                 <a:cs typeface="Courier New" pitchFamily="34" charset="-120"/>
               </a:rPr>
-              <a:t>zbp_r_connection</a:t>
+              <a:t>zbp_r_pc_item</a:t>
             </a:r>
             <a:r>
               <a:rPr lang="en-US" sz="1050" dirty="0">
@@ -4311,13 +4351,46 @@
             <a:r>
               <a:rPr lang="en-US" sz="1050" dirty="0">
                 <a:solidFill>
-                  <a:srgbClr val="000000"/>
+                  <a:srgbClr val="569CD6"/>
+                </a:solidFill>
+                <a:latin typeface="Courier New" pitchFamily="34" charset="0"/>
+                <a:ea typeface="Courier New" pitchFamily="34" charset="-122"/>
+                <a:cs typeface="Courier New" pitchFamily="34" charset="-120"/>
+              </a:rPr>
+              <a:t>with</a:t>
+            </a:r>
+            <a:r>
+              <a:rPr lang="en-US" sz="1050" dirty="0">
+                <a:solidFill>
+                  <a:srgbClr val="CCCCCC"/>
                 </a:solidFill>
                 <a:latin typeface="Courier New" pitchFamily="34" charset="0"/>
                 <a:ea typeface="Courier New" pitchFamily="34" charset="-122"/>
                 <a:cs typeface="Courier New" pitchFamily="34" charset="-120"/>
               </a:rPr>
               <a:t> </a:t>
+            </a:r>
+            <a:r>
+              <a:rPr lang="en-US" sz="1050" dirty="0">
+                <a:solidFill>
+                  <a:srgbClr val="569CD6"/>
+                </a:solidFill>
+                <a:latin typeface="Courier New" pitchFamily="34" charset="0"/>
+                <a:ea typeface="Courier New" pitchFamily="34" charset="-122"/>
+                <a:cs typeface="Courier New" pitchFamily="34" charset="-120"/>
+              </a:rPr>
+              <a:t>draft</a:t>
+            </a:r>
+            <a:r>
+              <a:rPr lang="en-US" sz="1050" dirty="0">
+                <a:solidFill>
+                  <a:srgbClr val="CCCCCC"/>
+                </a:solidFill>
+                <a:latin typeface="Courier New" pitchFamily="34" charset="0"/>
+                <a:ea typeface="Courier New" pitchFamily="34" charset="-122"/>
+                <a:cs typeface="Courier New" pitchFamily="34" charset="-120"/>
+              </a:rPr>
+              <a:t>;</a:t>
             </a:r>
             <a:endParaRPr lang="en-US" sz="1050" dirty="0"/>
           </a:p>
@@ -4331,123 +4404,13 @@
             <a:r>
               <a:rPr lang="en-US" sz="1050" dirty="0">
                 <a:solidFill>
-                  <a:srgbClr val="569CD6"/>
-                </a:solidFill>
-                <a:latin typeface="Courier New" pitchFamily="34" charset="0"/>
-                <a:ea typeface="Courier New" pitchFamily="34" charset="-122"/>
-                <a:cs typeface="Courier New" pitchFamily="34" charset="-120"/>
-              </a:rPr>
-              <a:t>define</a:t>
-            </a:r>
-            <a:r>
-              <a:rPr lang="en-US" sz="1050" dirty="0">
-                <a:solidFill>
-                  <a:srgbClr val="CCCCCC"/>
+                  <a:srgbClr val="000000"/>
                 </a:solidFill>
                 <a:latin typeface="Courier New" pitchFamily="34" charset="0"/>
                 <a:ea typeface="Courier New" pitchFamily="34" charset="-122"/>
                 <a:cs typeface="Courier New" pitchFamily="34" charset="-120"/>
               </a:rPr>
               <a:t> </a:t>
-            </a:r>
-            <a:r>
-              <a:rPr lang="en-US" sz="1050" dirty="0">
-                <a:solidFill>
-                  <a:srgbClr val="569CD6"/>
-                </a:solidFill>
-                <a:latin typeface="Courier New" pitchFamily="34" charset="0"/>
-                <a:ea typeface="Courier New" pitchFamily="34" charset="-122"/>
-                <a:cs typeface="Courier New" pitchFamily="34" charset="-120"/>
-              </a:rPr>
-              <a:t>behavior</a:t>
-            </a:r>
-            <a:r>
-              <a:rPr lang="en-US" sz="1050" dirty="0">
-                <a:solidFill>
-                  <a:srgbClr val="CCCCCC"/>
-                </a:solidFill>
-                <a:latin typeface="Courier New" pitchFamily="34" charset="0"/>
-                <a:ea typeface="Courier New" pitchFamily="34" charset="-122"/>
-                <a:cs typeface="Courier New" pitchFamily="34" charset="-120"/>
-              </a:rPr>
-              <a:t> </a:t>
-            </a:r>
-            <a:r>
-              <a:rPr lang="en-US" sz="1050" dirty="0">
-                <a:solidFill>
-                  <a:srgbClr val="569CD6"/>
-                </a:solidFill>
-                <a:latin typeface="Courier New" pitchFamily="34" charset="0"/>
-                <a:ea typeface="Courier New" pitchFamily="34" charset="-122"/>
-                <a:cs typeface="Courier New" pitchFamily="34" charset="-120"/>
-              </a:rPr>
-              <a:t>for</a:t>
-            </a:r>
-            <a:r>
-              <a:rPr lang="en-US" sz="1050" dirty="0">
-                <a:solidFill>
-                  <a:srgbClr val="CCCCCC"/>
-                </a:solidFill>
-                <a:latin typeface="Courier New" pitchFamily="34" charset="0"/>
-                <a:ea typeface="Courier New" pitchFamily="34" charset="-122"/>
-                <a:cs typeface="Courier New" pitchFamily="34" charset="-120"/>
-              </a:rPr>
-              <a:t> </a:t>
-            </a:r>
-            <a:r>
-              <a:rPr lang="en-US" sz="1050" dirty="0">
-                <a:solidFill>
-                  <a:srgbClr val="CCCCCC"/>
-                </a:solidFill>
-                <a:latin typeface="Courier New" pitchFamily="34" charset="0"/>
-                <a:ea typeface="Courier New" pitchFamily="34" charset="-122"/>
-                <a:cs typeface="Courier New" pitchFamily="34" charset="-120"/>
-              </a:rPr>
-              <a:t>Z_R_CONNECTION</a:t>
-            </a:r>
-            <a:r>
-              <a:rPr lang="en-US" sz="1050" dirty="0">
-                <a:solidFill>
-                  <a:srgbClr val="CCCCCC"/>
-                </a:solidFill>
-                <a:latin typeface="Courier New" pitchFamily="34" charset="0"/>
-                <a:ea typeface="Courier New" pitchFamily="34" charset="-122"/>
-                <a:cs typeface="Courier New" pitchFamily="34" charset="-120"/>
-              </a:rPr>
-              <a:t> </a:t>
-            </a:r>
-            <a:r>
-              <a:rPr lang="en-US" sz="1050" dirty="0">
-                <a:solidFill>
-                  <a:srgbClr val="569CD6"/>
-                </a:solidFill>
-                <a:latin typeface="Courier New" pitchFamily="34" charset="0"/>
-                <a:ea typeface="Courier New" pitchFamily="34" charset="-122"/>
-                <a:cs typeface="Courier New" pitchFamily="34" charset="-120"/>
-              </a:rPr>
-              <a:t>alias</a:t>
-            </a:r>
-            <a:r>
-              <a:rPr lang="en-US" sz="1050" dirty="0">
-                <a:solidFill>
-                  <a:srgbClr val="CCCCCC"/>
-                </a:solidFill>
-                <a:latin typeface="Courier New" pitchFamily="34" charset="0"/>
-                <a:ea typeface="Courier New" pitchFamily="34" charset="-122"/>
-                <a:cs typeface="Courier New" pitchFamily="34" charset="-120"/>
-              </a:rPr>
-              <a:t> </a:t>
-            </a:r>
-            <a:r>
-              <a:rPr lang="en-US" sz="1050" dirty="0">
-                <a:solidFill>
-                  <a:srgbClr val="CCCCCC"/>
-                </a:solidFill>
-                <a:latin typeface="Courier New" pitchFamily="34" charset="0"/>
-                <a:ea typeface="Courier New" pitchFamily="34" charset="-122"/>
-                <a:cs typeface="Courier New" pitchFamily="34" charset="-120"/>
-              </a:rPr>
-              <a:t>Connection</a:t>
             </a:r>
             <a:endParaRPr lang="en-US" sz="1050" dirty="0"/>
           </a:p>
@@ -4467,7 +4430,7 @@
                 <a:ea typeface="Courier New" pitchFamily="34" charset="-122"/>
                 <a:cs typeface="Courier New" pitchFamily="34" charset="-120"/>
               </a:rPr>
-              <a:t>persistent</a:t>
+              <a:t>define</a:t>
             </a:r>
             <a:r>
               <a:rPr lang="en-US" sz="1050" dirty="0">
@@ -4489,7 +4452,7 @@
                 <a:ea typeface="Courier New" pitchFamily="34" charset="-122"/>
                 <a:cs typeface="Courier New" pitchFamily="34" charset="-120"/>
               </a:rPr>
-              <a:t>table</a:t>
+              <a:t>behavior</a:t>
             </a:r>
             <a:r>
               <a:rPr lang="en-US" sz="1050" dirty="0">
@@ -4505,13 +4468,79 @@
             <a:r>
               <a:rPr lang="en-US" sz="1050" dirty="0">
                 <a:solidFill>
-                  <a:srgbClr val="CCCCCC"/>
-                </a:solidFill>
-                <a:latin typeface="Courier New" pitchFamily="34" charset="0"/>
-                <a:ea typeface="Courier New" pitchFamily="34" charset="-122"/>
-                <a:cs typeface="Courier New" pitchFamily="34" charset="-120"/>
-              </a:rPr>
-              <a:t>zconnection</a:t>
+                  <a:srgbClr val="569CD6"/>
+                </a:solidFill>
+                <a:latin typeface="Courier New" pitchFamily="34" charset="0"/>
+                <a:ea typeface="Courier New" pitchFamily="34" charset="-122"/>
+                <a:cs typeface="Courier New" pitchFamily="34" charset="-120"/>
+              </a:rPr>
+              <a:t>for</a:t>
+            </a:r>
+            <a:r>
+              <a:rPr lang="en-US" sz="1050" dirty="0">
+                <a:solidFill>
+                  <a:srgbClr val="CCCCCC"/>
+                </a:solidFill>
+                <a:latin typeface="Courier New" pitchFamily="34" charset="0"/>
+                <a:ea typeface="Courier New" pitchFamily="34" charset="-122"/>
+                <a:cs typeface="Courier New" pitchFamily="34" charset="-120"/>
+              </a:rPr>
+              <a:t> </a:t>
+            </a:r>
+            <a:r>
+              <a:rPr lang="en-US" sz="1050" dirty="0">
+                <a:solidFill>
+                  <a:srgbClr val="CCCCCC"/>
+                </a:solidFill>
+                <a:latin typeface="Courier New" pitchFamily="34" charset="0"/>
+                <a:ea typeface="Courier New" pitchFamily="34" charset="-122"/>
+                <a:cs typeface="Courier New" pitchFamily="34" charset="-120"/>
+              </a:rPr>
+              <a:t>ZR_PC_ITEM</a:t>
+            </a:r>
+            <a:r>
+              <a:rPr lang="en-US" sz="1050" dirty="0">
+                <a:solidFill>
+                  <a:srgbClr val="CCCCCC"/>
+                </a:solidFill>
+                <a:latin typeface="Courier New" pitchFamily="34" charset="0"/>
+                <a:ea typeface="Courier New" pitchFamily="34" charset="-122"/>
+                <a:cs typeface="Courier New" pitchFamily="34" charset="-120"/>
+              </a:rPr>
+              <a:t> </a:t>
+            </a:r>
+            <a:r>
+              <a:rPr lang="en-US" sz="1050" dirty="0">
+                <a:solidFill>
+                  <a:srgbClr val="569CD6"/>
+                </a:solidFill>
+                <a:latin typeface="Courier New" pitchFamily="34" charset="0"/>
+                <a:ea typeface="Courier New" pitchFamily="34" charset="-122"/>
+                <a:cs typeface="Courier New" pitchFamily="34" charset="-120"/>
+              </a:rPr>
+              <a:t>alias</a:t>
+            </a:r>
+            <a:r>
+              <a:rPr lang="en-US" sz="1050" dirty="0">
+                <a:solidFill>
+                  <a:srgbClr val="CCCCCC"/>
+                </a:solidFill>
+                <a:latin typeface="Courier New" pitchFamily="34" charset="0"/>
+                <a:ea typeface="Courier New" pitchFamily="34" charset="-122"/>
+                <a:cs typeface="Courier New" pitchFamily="34" charset="-120"/>
+              </a:rPr>
+              <a:t> </a:t>
+            </a:r>
+            <a:r>
+              <a:rPr lang="en-US" sz="1050" dirty="0">
+                <a:solidFill>
+                  <a:srgbClr val="CCCCCC"/>
+                </a:solidFill>
+                <a:latin typeface="Courier New" pitchFamily="34" charset="0"/>
+                <a:ea typeface="Courier New" pitchFamily="34" charset="-122"/>
+                <a:cs typeface="Courier New" pitchFamily="34" charset="-120"/>
+              </a:rPr>
+              <a:t>Item</a:t>
             </a:r>
             <a:endParaRPr lang="en-US" sz="1050" dirty="0"/>
           </a:p>
@@ -4531,7 +4560,7 @@
                 <a:ea typeface="Courier New" pitchFamily="34" charset="-122"/>
                 <a:cs typeface="Courier New" pitchFamily="34" charset="-120"/>
               </a:rPr>
-              <a:t>lock</a:t>
+              <a:t>persistent</a:t>
             </a:r>
             <a:r>
               <a:rPr lang="en-US" sz="1050" dirty="0">
@@ -4553,7 +4582,29 @@
                 <a:ea typeface="Courier New" pitchFamily="34" charset="-122"/>
                 <a:cs typeface="Courier New" pitchFamily="34" charset="-120"/>
               </a:rPr>
-              <a:t>master</a:t>
+              <a:t>table</a:t>
+            </a:r>
+            <a:r>
+              <a:rPr lang="en-US" sz="1050" dirty="0">
+                <a:solidFill>
+                  <a:srgbClr val="CCCCCC"/>
+                </a:solidFill>
+                <a:latin typeface="Courier New" pitchFamily="34" charset="0"/>
+                <a:ea typeface="Courier New" pitchFamily="34" charset="-122"/>
+                <a:cs typeface="Courier New" pitchFamily="34" charset="-120"/>
+              </a:rPr>
+              <a:t> </a:t>
+            </a:r>
+            <a:r>
+              <a:rPr lang="en-US" sz="1050" dirty="0">
+                <a:solidFill>
+                  <a:srgbClr val="CCCCCC"/>
+                </a:solidFill>
+                <a:latin typeface="Courier New" pitchFamily="34" charset="0"/>
+                <a:ea typeface="Courier New" pitchFamily="34" charset="-122"/>
+                <a:cs typeface="Courier New" pitchFamily="34" charset="-120"/>
+              </a:rPr>
+              <a:t>zta_pc_item</a:t>
             </a:r>
             <a:endParaRPr lang="en-US" sz="1050" dirty="0"/>
           </a:p>
@@ -4573,7 +4624,7 @@
                 <a:ea typeface="Courier New" pitchFamily="34" charset="-122"/>
                 <a:cs typeface="Courier New" pitchFamily="34" charset="-120"/>
               </a:rPr>
-              <a:t>authorization</a:t>
+              <a:t>draft</a:t>
             </a:r>
             <a:r>
               <a:rPr lang="en-US" sz="1050" dirty="0">
@@ -4595,7 +4646,7 @@
                 <a:ea typeface="Courier New" pitchFamily="34" charset="-122"/>
                 <a:cs typeface="Courier New" pitchFamily="34" charset="-120"/>
               </a:rPr>
-              <a:t>master</a:t>
+              <a:t>table</a:t>
             </a:r>
             <a:r>
               <a:rPr lang="en-US" sz="1050" dirty="0">
@@ -4617,51 +4668,7 @@
                 <a:ea typeface="Courier New" pitchFamily="34" charset="-122"/>
                 <a:cs typeface="Courier New" pitchFamily="34" charset="-120"/>
               </a:rPr>
-              <a:t>(</a:t>
-            </a:r>
-            <a:r>
-              <a:rPr lang="en-US" sz="1050" dirty="0">
-                <a:solidFill>
-                  <a:srgbClr val="CCCCCC"/>
-                </a:solidFill>
-                <a:latin typeface="Courier New" pitchFamily="34" charset="0"/>
-                <a:ea typeface="Courier New" pitchFamily="34" charset="-122"/>
-                <a:cs typeface="Courier New" pitchFamily="34" charset="-120"/>
-              </a:rPr>
-              <a:t> </a:t>
-            </a:r>
-            <a:r>
-              <a:rPr lang="en-US" sz="1050" dirty="0">
-                <a:solidFill>
-                  <a:srgbClr val="569CD6"/>
-                </a:solidFill>
-                <a:latin typeface="Courier New" pitchFamily="34" charset="0"/>
-                <a:ea typeface="Courier New" pitchFamily="34" charset="-122"/>
-                <a:cs typeface="Courier New" pitchFamily="34" charset="-120"/>
-              </a:rPr>
-              <a:t>instance</a:t>
-            </a:r>
-            <a:r>
-              <a:rPr lang="en-US" sz="1050" dirty="0">
-                <a:solidFill>
-                  <a:srgbClr val="CCCCCC"/>
-                </a:solidFill>
-                <a:latin typeface="Courier New" pitchFamily="34" charset="0"/>
-                <a:ea typeface="Courier New" pitchFamily="34" charset="-122"/>
-                <a:cs typeface="Courier New" pitchFamily="34" charset="-120"/>
-              </a:rPr>
-              <a:t> </a:t>
-            </a:r>
-            <a:r>
-              <a:rPr lang="en-US" sz="1050" dirty="0">
-                <a:solidFill>
-                  <a:srgbClr val="CCCCCC"/>
-                </a:solidFill>
-                <a:latin typeface="Courier New" pitchFamily="34" charset="0"/>
-                <a:ea typeface="Courier New" pitchFamily="34" charset="-122"/>
-                <a:cs typeface="Courier New" pitchFamily="34" charset="-120"/>
-              </a:rPr>
-              <a:t>)</a:t>
+              <a:t>zta_pc_item_d</a:t>
             </a:r>
             <a:endParaRPr lang="en-US" sz="1050" dirty="0"/>
           </a:p>
@@ -4739,13 +4746,101 @@
             <a:r>
               <a:rPr lang="en-US" sz="1050" dirty="0">
                 <a:solidFill>
-                  <a:srgbClr val="CCCCCC"/>
-                </a:solidFill>
-                <a:latin typeface="Courier New" pitchFamily="34" charset="0"/>
-                <a:ea typeface="Courier New" pitchFamily="34" charset="-122"/>
-                <a:cs typeface="Courier New" pitchFamily="34" charset="-120"/>
-              </a:rPr>
-              <a:t>{</a:t>
+                  <a:srgbClr val="569CD6"/>
+                </a:solidFill>
+                <a:latin typeface="Courier New" pitchFamily="34" charset="0"/>
+                <a:ea typeface="Courier New" pitchFamily="34" charset="-122"/>
+                <a:cs typeface="Courier New" pitchFamily="34" charset="-120"/>
+              </a:rPr>
+              <a:t>lock</a:t>
+            </a:r>
+            <a:r>
+              <a:rPr lang="en-US" sz="1050" dirty="0">
+                <a:solidFill>
+                  <a:srgbClr val="CCCCCC"/>
+                </a:solidFill>
+                <a:latin typeface="Courier New" pitchFamily="34" charset="0"/>
+                <a:ea typeface="Courier New" pitchFamily="34" charset="-122"/>
+                <a:cs typeface="Courier New" pitchFamily="34" charset="-120"/>
+              </a:rPr>
+              <a:t> </a:t>
+            </a:r>
+            <a:r>
+              <a:rPr lang="en-US" sz="1050" dirty="0">
+                <a:solidFill>
+                  <a:srgbClr val="569CD6"/>
+                </a:solidFill>
+                <a:latin typeface="Courier New" pitchFamily="34" charset="0"/>
+                <a:ea typeface="Courier New" pitchFamily="34" charset="-122"/>
+                <a:cs typeface="Courier New" pitchFamily="34" charset="-120"/>
+              </a:rPr>
+              <a:t>master</a:t>
+            </a:r>
+            <a:r>
+              <a:rPr lang="en-US" sz="1050" dirty="0">
+                <a:solidFill>
+                  <a:srgbClr val="CCCCCC"/>
+                </a:solidFill>
+                <a:latin typeface="Courier New" pitchFamily="34" charset="0"/>
+                <a:ea typeface="Courier New" pitchFamily="34" charset="-122"/>
+                <a:cs typeface="Courier New" pitchFamily="34" charset="-120"/>
+              </a:rPr>
+              <a:t> </a:t>
+            </a:r>
+            <a:r>
+              <a:rPr lang="en-US" sz="1050" dirty="0">
+                <a:solidFill>
+                  <a:srgbClr val="CCCCCC"/>
+                </a:solidFill>
+                <a:latin typeface="Courier New" pitchFamily="34" charset="0"/>
+                <a:ea typeface="Courier New" pitchFamily="34" charset="-122"/>
+                <a:cs typeface="Courier New" pitchFamily="34" charset="-120"/>
+              </a:rPr>
+              <a:t>total</a:t>
+            </a:r>
+            <a:r>
+              <a:rPr lang="en-US" sz="1050" dirty="0">
+                <a:solidFill>
+                  <a:srgbClr val="CCCCCC"/>
+                </a:solidFill>
+                <a:latin typeface="Courier New" pitchFamily="34" charset="0"/>
+                <a:ea typeface="Courier New" pitchFamily="34" charset="-122"/>
+                <a:cs typeface="Courier New" pitchFamily="34" charset="-120"/>
+              </a:rPr>
+              <a:t> </a:t>
+            </a:r>
+            <a:r>
+              <a:rPr lang="en-US" sz="1050" dirty="0">
+                <a:solidFill>
+                  <a:srgbClr val="569CD6"/>
+                </a:solidFill>
+                <a:latin typeface="Courier New" pitchFamily="34" charset="0"/>
+                <a:ea typeface="Courier New" pitchFamily="34" charset="-122"/>
+                <a:cs typeface="Courier New" pitchFamily="34" charset="-120"/>
+              </a:rPr>
+              <a:t>etag</a:t>
+            </a:r>
+            <a:r>
+              <a:rPr lang="en-US" sz="1050" dirty="0">
+                <a:solidFill>
+                  <a:srgbClr val="CCCCCC"/>
+                </a:solidFill>
+                <a:latin typeface="Courier New" pitchFamily="34" charset="0"/>
+                <a:ea typeface="Courier New" pitchFamily="34" charset="-122"/>
+                <a:cs typeface="Courier New" pitchFamily="34" charset="-120"/>
+              </a:rPr>
+              <a:t> </a:t>
+            </a:r>
+            <a:r>
+              <a:rPr lang="en-US" sz="1050" dirty="0">
+                <a:solidFill>
+                  <a:srgbClr val="CCCCCC"/>
+                </a:solidFill>
+                <a:latin typeface="Courier New" pitchFamily="34" charset="0"/>
+                <a:ea typeface="Courier New" pitchFamily="34" charset="-122"/>
+                <a:cs typeface="Courier New" pitchFamily="34" charset="-120"/>
+              </a:rPr>
+              <a:t>LastChangedAt</a:t>
             </a:r>
             <a:endParaRPr lang="en-US" sz="1050" dirty="0"/>
           </a:p>
@@ -4759,35 +4854,101 @@
             <a:r>
               <a:rPr lang="en-US" sz="1050" dirty="0">
                 <a:solidFill>
-                  <a:srgbClr val="CCCCCC"/>
-                </a:solidFill>
-                <a:latin typeface="Courier New" pitchFamily="34" charset="0"/>
-                <a:ea typeface="Courier New" pitchFamily="34" charset="-122"/>
-                <a:cs typeface="Courier New" pitchFamily="34" charset="-120"/>
-              </a:rPr>
-              <a:t>  </a:t>
-            </a:r>
-            <a:r>
-              <a:rPr lang="en-US" sz="1050" dirty="0">
-                <a:solidFill>
                   <a:srgbClr val="569CD6"/>
                 </a:solidFill>
                 <a:latin typeface="Courier New" pitchFamily="34" charset="0"/>
                 <a:ea typeface="Courier New" pitchFamily="34" charset="-122"/>
                 <a:cs typeface="Courier New" pitchFamily="34" charset="-120"/>
               </a:rPr>
-              <a:t>create</a:t>
-            </a:r>
-            <a:r>
-              <a:rPr lang="en-US" sz="1050" dirty="0">
-                <a:solidFill>
-                  <a:srgbClr val="CCCCCC"/>
-                </a:solidFill>
-                <a:latin typeface="Courier New" pitchFamily="34" charset="0"/>
-                <a:ea typeface="Courier New" pitchFamily="34" charset="-122"/>
-                <a:cs typeface="Courier New" pitchFamily="34" charset="-120"/>
-              </a:rPr>
-              <a:t>;</a:t>
+              <a:t>authorization</a:t>
+            </a:r>
+            <a:r>
+              <a:rPr lang="en-US" sz="1050" dirty="0">
+                <a:solidFill>
+                  <a:srgbClr val="CCCCCC"/>
+                </a:solidFill>
+                <a:latin typeface="Courier New" pitchFamily="34" charset="0"/>
+                <a:ea typeface="Courier New" pitchFamily="34" charset="-122"/>
+                <a:cs typeface="Courier New" pitchFamily="34" charset="-120"/>
+              </a:rPr>
+              <a:t> </a:t>
+            </a:r>
+            <a:r>
+              <a:rPr lang="en-US" sz="1050" dirty="0">
+                <a:solidFill>
+                  <a:srgbClr val="569CD6"/>
+                </a:solidFill>
+                <a:latin typeface="Courier New" pitchFamily="34" charset="0"/>
+                <a:ea typeface="Courier New" pitchFamily="34" charset="-122"/>
+                <a:cs typeface="Courier New" pitchFamily="34" charset="-120"/>
+              </a:rPr>
+              <a:t>master</a:t>
+            </a:r>
+            <a:r>
+              <a:rPr lang="en-US" sz="1050" dirty="0">
+                <a:solidFill>
+                  <a:srgbClr val="CCCCCC"/>
+                </a:solidFill>
+                <a:latin typeface="Courier New" pitchFamily="34" charset="0"/>
+                <a:ea typeface="Courier New" pitchFamily="34" charset="-122"/>
+                <a:cs typeface="Courier New" pitchFamily="34" charset="-120"/>
+              </a:rPr>
+              <a:t> </a:t>
+            </a:r>
+            <a:r>
+              <a:rPr lang="en-US" sz="1050" dirty="0">
+                <a:solidFill>
+                  <a:srgbClr val="CCCCCC"/>
+                </a:solidFill>
+                <a:latin typeface="Courier New" pitchFamily="34" charset="0"/>
+                <a:ea typeface="Courier New" pitchFamily="34" charset="-122"/>
+                <a:cs typeface="Courier New" pitchFamily="34" charset="-120"/>
+              </a:rPr>
+              <a:t>(</a:t>
+            </a:r>
+            <a:r>
+              <a:rPr lang="en-US" sz="1050" dirty="0">
+                <a:solidFill>
+                  <a:srgbClr val="CCCCCC"/>
+                </a:solidFill>
+                <a:latin typeface="Courier New" pitchFamily="34" charset="0"/>
+                <a:ea typeface="Courier New" pitchFamily="34" charset="-122"/>
+                <a:cs typeface="Courier New" pitchFamily="34" charset="-120"/>
+              </a:rPr>
+              <a:t> </a:t>
+            </a:r>
+            <a:r>
+              <a:rPr lang="en-US" sz="1050" dirty="0">
+                <a:solidFill>
+                  <a:srgbClr val="569CD6"/>
+                </a:solidFill>
+                <a:latin typeface="Courier New" pitchFamily="34" charset="0"/>
+                <a:ea typeface="Courier New" pitchFamily="34" charset="-122"/>
+                <a:cs typeface="Courier New" pitchFamily="34" charset="-120"/>
+              </a:rPr>
+              <a:t>global</a:t>
+            </a:r>
+            <a:r>
+              <a:rPr lang="en-US" sz="1050" dirty="0">
+                <a:solidFill>
+                  <a:srgbClr val="CCCCCC"/>
+                </a:solidFill>
+                <a:latin typeface="Courier New" pitchFamily="34" charset="0"/>
+                <a:ea typeface="Courier New" pitchFamily="34" charset="-122"/>
+                <a:cs typeface="Courier New" pitchFamily="34" charset="-120"/>
+              </a:rPr>
+              <a:t> </a:t>
+            </a:r>
+            <a:r>
+              <a:rPr lang="en-US" sz="1050" dirty="0">
+                <a:solidFill>
+                  <a:srgbClr val="CCCCCC"/>
+                </a:solidFill>
+                <a:latin typeface="Courier New" pitchFamily="34" charset="0"/>
+                <a:ea typeface="Courier New" pitchFamily="34" charset="-122"/>
+                <a:cs typeface="Courier New" pitchFamily="34" charset="-120"/>
+              </a:rPr>
+              <a:t>)</a:t>
             </a:r>
             <a:endParaRPr lang="en-US" sz="1050" dirty="0"/>
           </a:p>
@@ -4807,29 +4968,7 @@
                 <a:ea typeface="Courier New" pitchFamily="34" charset="-122"/>
                 <a:cs typeface="Courier New" pitchFamily="34" charset="-120"/>
               </a:rPr>
-              <a:t>  </a:t>
-            </a:r>
-            <a:r>
-              <a:rPr lang="en-US" sz="1050" dirty="0">
-                <a:solidFill>
-                  <a:srgbClr val="569CD6"/>
-                </a:solidFill>
-                <a:latin typeface="Courier New" pitchFamily="34" charset="0"/>
-                <a:ea typeface="Courier New" pitchFamily="34" charset="-122"/>
-                <a:cs typeface="Courier New" pitchFamily="34" charset="-120"/>
-              </a:rPr>
-              <a:t>update</a:t>
-            </a:r>
-            <a:r>
-              <a:rPr lang="en-US" sz="1050" dirty="0">
-                <a:solidFill>
-                  <a:srgbClr val="CCCCCC"/>
-                </a:solidFill>
-                <a:latin typeface="Courier New" pitchFamily="34" charset="0"/>
-                <a:ea typeface="Courier New" pitchFamily="34" charset="-122"/>
-                <a:cs typeface="Courier New" pitchFamily="34" charset="-120"/>
-              </a:rPr>
-              <a:t>;</a:t>
+              <a:t>{</a:t>
             </a:r>
             <a:endParaRPr lang="en-US" sz="1050" dirty="0"/>
           </a:p>
@@ -4860,7 +4999,7 @@
                 <a:ea typeface="Courier New" pitchFamily="34" charset="-122"/>
                 <a:cs typeface="Courier New" pitchFamily="34" charset="-120"/>
               </a:rPr>
-              <a:t>delete</a:t>
+              <a:t>create</a:t>
             </a:r>
             <a:r>
               <a:rPr lang="en-US" sz="1050" dirty="0">
@@ -4902,172 +5041,7 @@
                 <a:ea typeface="Courier New" pitchFamily="34" charset="-122"/>
                 <a:cs typeface="Courier New" pitchFamily="34" charset="-120"/>
               </a:rPr>
-              <a:t>field</a:t>
-            </a:r>
-            <a:r>
-              <a:rPr lang="en-US" sz="1050" dirty="0">
-                <a:solidFill>
-                  <a:srgbClr val="CCCCCC"/>
-                </a:solidFill>
-                <a:latin typeface="Courier New" pitchFamily="34" charset="0"/>
-                <a:ea typeface="Courier New" pitchFamily="34" charset="-122"/>
-                <a:cs typeface="Courier New" pitchFamily="34" charset="-120"/>
-              </a:rPr>
-              <a:t> </a:t>
-            </a:r>
-            <a:r>
-              <a:rPr lang="en-US" sz="1050" dirty="0">
-                <a:solidFill>
-                  <a:srgbClr val="CCCCCC"/>
-                </a:solidFill>
-                <a:latin typeface="Courier New" pitchFamily="34" charset="0"/>
-                <a:ea typeface="Courier New" pitchFamily="34" charset="-122"/>
-                <a:cs typeface="Courier New" pitchFamily="34" charset="-120"/>
-              </a:rPr>
-              <a:t>(</a:t>
-            </a:r>
-            <a:r>
-              <a:rPr lang="en-US" sz="1050" dirty="0">
-                <a:solidFill>
-                  <a:srgbClr val="CCCCCC"/>
-                </a:solidFill>
-                <a:latin typeface="Courier New" pitchFamily="34" charset="0"/>
-                <a:ea typeface="Courier New" pitchFamily="34" charset="-122"/>
-                <a:cs typeface="Courier New" pitchFamily="34" charset="-120"/>
-              </a:rPr>
-              <a:t> </a:t>
-            </a:r>
-            <a:r>
-              <a:rPr lang="en-US" sz="1050" dirty="0">
-                <a:solidFill>
-                  <a:srgbClr val="569CD6"/>
-                </a:solidFill>
-                <a:latin typeface="Courier New" pitchFamily="34" charset="0"/>
-                <a:ea typeface="Courier New" pitchFamily="34" charset="-122"/>
-                <a:cs typeface="Courier New" pitchFamily="34" charset="-120"/>
-              </a:rPr>
-              <a:t>readonly</a:t>
-            </a:r>
-            <a:r>
-              <a:rPr lang="en-US" sz="1050" dirty="0">
-                <a:solidFill>
-                  <a:srgbClr val="CCCCCC"/>
-                </a:solidFill>
-                <a:latin typeface="Courier New" pitchFamily="34" charset="0"/>
-                <a:ea typeface="Courier New" pitchFamily="34" charset="-122"/>
-                <a:cs typeface="Courier New" pitchFamily="34" charset="-120"/>
-              </a:rPr>
-              <a:t>,</a:t>
-            </a:r>
-            <a:r>
-              <a:rPr lang="en-US" sz="1050" dirty="0">
-                <a:solidFill>
-                  <a:srgbClr val="CCCCCC"/>
-                </a:solidFill>
-                <a:latin typeface="Courier New" pitchFamily="34" charset="0"/>
-                <a:ea typeface="Courier New" pitchFamily="34" charset="-122"/>
-                <a:cs typeface="Courier New" pitchFamily="34" charset="-120"/>
-              </a:rPr>
-              <a:t> </a:t>
-            </a:r>
-            <a:r>
-              <a:rPr lang="en-US" sz="1050" dirty="0">
-                <a:solidFill>
-                  <a:srgbClr val="569CD6"/>
-                </a:solidFill>
-                <a:latin typeface="Courier New" pitchFamily="34" charset="0"/>
-                <a:ea typeface="Courier New" pitchFamily="34" charset="-122"/>
-                <a:cs typeface="Courier New" pitchFamily="34" charset="-120"/>
-              </a:rPr>
-              <a:t>numbering</a:t>
-            </a:r>
-            <a:r>
-              <a:rPr lang="en-US" sz="1050" dirty="0">
-                <a:solidFill>
-                  <a:srgbClr val="CCCCCC"/>
-                </a:solidFill>
-                <a:latin typeface="Courier New" pitchFamily="34" charset="0"/>
-                <a:ea typeface="Courier New" pitchFamily="34" charset="-122"/>
-                <a:cs typeface="Courier New" pitchFamily="34" charset="-120"/>
-              </a:rPr>
-              <a:t> </a:t>
-            </a:r>
-            <a:r>
-              <a:rPr lang="en-US" sz="1050" dirty="0">
-                <a:solidFill>
-                  <a:srgbClr val="CCCCCC"/>
-                </a:solidFill>
-                <a:latin typeface="Courier New" pitchFamily="34" charset="0"/>
-                <a:ea typeface="Courier New" pitchFamily="34" charset="-122"/>
-                <a:cs typeface="Courier New" pitchFamily="34" charset="-120"/>
-              </a:rPr>
-              <a:t>:</a:t>
-            </a:r>
-            <a:r>
-              <a:rPr lang="en-US" sz="1050" dirty="0">
-                <a:solidFill>
-                  <a:srgbClr val="CCCCCC"/>
-                </a:solidFill>
-                <a:latin typeface="Courier New" pitchFamily="34" charset="0"/>
-                <a:ea typeface="Courier New" pitchFamily="34" charset="-122"/>
-                <a:cs typeface="Courier New" pitchFamily="34" charset="-120"/>
-              </a:rPr>
-              <a:t> </a:t>
-            </a:r>
-            <a:r>
-              <a:rPr lang="en-US" sz="1050" dirty="0">
-                <a:solidFill>
-                  <a:srgbClr val="569CD6"/>
-                </a:solidFill>
-                <a:latin typeface="Courier New" pitchFamily="34" charset="0"/>
-                <a:ea typeface="Courier New" pitchFamily="34" charset="-122"/>
-                <a:cs typeface="Courier New" pitchFamily="34" charset="-120"/>
-              </a:rPr>
-              <a:t>managed</a:t>
-            </a:r>
-            <a:r>
-              <a:rPr lang="en-US" sz="1050" dirty="0">
-                <a:solidFill>
-                  <a:srgbClr val="CCCCCC"/>
-                </a:solidFill>
-                <a:latin typeface="Courier New" pitchFamily="34" charset="0"/>
-                <a:ea typeface="Courier New" pitchFamily="34" charset="-122"/>
-                <a:cs typeface="Courier New" pitchFamily="34" charset="-120"/>
-              </a:rPr>
-              <a:t> </a:t>
-            </a:r>
-            <a:r>
-              <a:rPr lang="en-US" sz="1050" dirty="0">
-                <a:solidFill>
-                  <a:srgbClr val="CCCCCC"/>
-                </a:solidFill>
-                <a:latin typeface="Courier New" pitchFamily="34" charset="0"/>
-                <a:ea typeface="Courier New" pitchFamily="34" charset="-122"/>
-                <a:cs typeface="Courier New" pitchFamily="34" charset="-120"/>
-              </a:rPr>
-              <a:t>)</a:t>
-            </a:r>
-            <a:r>
-              <a:rPr lang="en-US" sz="1050" dirty="0">
-                <a:solidFill>
-                  <a:srgbClr val="CCCCCC"/>
-                </a:solidFill>
-                <a:latin typeface="Courier New" pitchFamily="34" charset="0"/>
-                <a:ea typeface="Courier New" pitchFamily="34" charset="-122"/>
-                <a:cs typeface="Courier New" pitchFamily="34" charset="-120"/>
-              </a:rPr>
-              <a:t> </a:t>
-            </a:r>
-            <a:r>
-              <a:rPr lang="en-US" sz="1050" dirty="0">
-                <a:solidFill>
-                  <a:srgbClr val="CCCCCC"/>
-                </a:solidFill>
-                <a:latin typeface="Courier New" pitchFamily="34" charset="0"/>
-                <a:ea typeface="Courier New" pitchFamily="34" charset="-122"/>
-                <a:cs typeface="Courier New" pitchFamily="34" charset="-120"/>
-              </a:rPr>
-              <a:t>Uuid</a:t>
+              <a:t>update</a:t>
             </a:r>
             <a:r>
               <a:rPr lang="en-US" sz="1050" dirty="0">
@@ -5109,7 +5083,7 @@
                 <a:ea typeface="Courier New" pitchFamily="34" charset="-122"/>
                 <a:cs typeface="Courier New" pitchFamily="34" charset="-120"/>
               </a:rPr>
-              <a:t>validation</a:t>
+              <a:t>delete</a:t>
             </a:r>
             <a:r>
               <a:rPr lang="en-US" sz="1050" dirty="0">
@@ -5131,7 +5105,7 @@
                 <a:ea typeface="Courier New" pitchFamily="34" charset="-122"/>
                 <a:cs typeface="Courier New" pitchFamily="34" charset="-120"/>
               </a:rPr>
-              <a:t>CheckSemanticKey</a:t>
+              <a:t>(</a:t>
             </a:r>
             <a:r>
               <a:rPr lang="en-US" sz="1050" dirty="0">
@@ -5147,13 +5121,68 @@
             <a:r>
               <a:rPr lang="en-US" sz="1050" dirty="0">
                 <a:solidFill>
+                  <a:srgbClr val="CCCCCC"/>
+                </a:solidFill>
+                <a:latin typeface="Courier New" pitchFamily="34" charset="0"/>
+                <a:ea typeface="Courier New" pitchFamily="34" charset="-122"/>
+                <a:cs typeface="Courier New" pitchFamily="34" charset="-120"/>
+              </a:rPr>
+              <a:t>features</a:t>
+            </a:r>
+            <a:r>
+              <a:rPr lang="en-US" sz="1050" dirty="0">
+                <a:solidFill>
+                  <a:srgbClr val="CCCCCC"/>
+                </a:solidFill>
+                <a:latin typeface="Courier New" pitchFamily="34" charset="0"/>
+                <a:ea typeface="Courier New" pitchFamily="34" charset="-122"/>
+                <a:cs typeface="Courier New" pitchFamily="34" charset="-120"/>
+              </a:rPr>
+              <a:t> </a:t>
+            </a:r>
+            <a:r>
+              <a:rPr lang="en-US" sz="1050" dirty="0">
+                <a:solidFill>
+                  <a:srgbClr val="CCCCCC"/>
+                </a:solidFill>
+                <a:latin typeface="Courier New" pitchFamily="34" charset="0"/>
+                <a:ea typeface="Courier New" pitchFamily="34" charset="-122"/>
+                <a:cs typeface="Courier New" pitchFamily="34" charset="-120"/>
+              </a:rPr>
+              <a:t>:</a:t>
+            </a:r>
+            <a:r>
+              <a:rPr lang="en-US" sz="1050" dirty="0">
+                <a:solidFill>
+                  <a:srgbClr val="CCCCCC"/>
+                </a:solidFill>
+                <a:latin typeface="Courier New" pitchFamily="34" charset="0"/>
+                <a:ea typeface="Courier New" pitchFamily="34" charset="-122"/>
+                <a:cs typeface="Courier New" pitchFamily="34" charset="-120"/>
+              </a:rPr>
+              <a:t> </a:t>
+            </a:r>
+            <a:r>
+              <a:rPr lang="en-US" sz="1050" dirty="0">
+                <a:solidFill>
                   <a:srgbClr val="569CD6"/>
                 </a:solidFill>
                 <a:latin typeface="Courier New" pitchFamily="34" charset="0"/>
                 <a:ea typeface="Courier New" pitchFamily="34" charset="-122"/>
                 <a:cs typeface="Courier New" pitchFamily="34" charset="-120"/>
               </a:rPr>
-              <a:t>on</a:t>
+              <a:t>instance</a:t>
+            </a:r>
+            <a:r>
+              <a:rPr lang="en-US" sz="1050" dirty="0">
+                <a:solidFill>
+                  <a:srgbClr val="CCCCCC"/>
+                </a:solidFill>
+                <a:latin typeface="Courier New" pitchFamily="34" charset="0"/>
+                <a:ea typeface="Courier New" pitchFamily="34" charset="-122"/>
+                <a:cs typeface="Courier New" pitchFamily="34" charset="-120"/>
+              </a:rPr>
+              <a:t>,</a:t>
             </a:r>
             <a:r>
               <a:rPr lang="en-US" sz="1050" dirty="0">
@@ -5169,13 +5198,13 @@
             <a:r>
               <a:rPr lang="en-US" sz="1050" dirty="0">
                 <a:solidFill>
-                  <a:srgbClr val="569CD6"/>
-                </a:solidFill>
-                <a:latin typeface="Courier New" pitchFamily="34" charset="0"/>
-                <a:ea typeface="Courier New" pitchFamily="34" charset="-122"/>
-                <a:cs typeface="Courier New" pitchFamily="34" charset="-120"/>
-              </a:rPr>
-              <a:t>save</a:t>
+                  <a:srgbClr val="CCCCCC"/>
+                </a:solidFill>
+                <a:latin typeface="Courier New" pitchFamily="34" charset="0"/>
+                <a:ea typeface="Courier New" pitchFamily="34" charset="-122"/>
+                <a:cs typeface="Courier New" pitchFamily="34" charset="-120"/>
+              </a:rPr>
+              <a:t>precheck</a:t>
             </a:r>
             <a:r>
               <a:rPr lang="en-US" sz="1050" dirty="0">
@@ -5197,29 +5226,7 @@
                 <a:ea typeface="Courier New" pitchFamily="34" charset="-122"/>
                 <a:cs typeface="Courier New" pitchFamily="34" charset="-120"/>
               </a:rPr>
-              <a:t>{</a:t>
-            </a:r>
-            <a:r>
-              <a:rPr lang="en-US" sz="1050" dirty="0">
-                <a:solidFill>
-                  <a:srgbClr val="CCCCCC"/>
-                </a:solidFill>
-                <a:latin typeface="Courier New" pitchFamily="34" charset="0"/>
-                <a:ea typeface="Courier New" pitchFamily="34" charset="-122"/>
-                <a:cs typeface="Courier New" pitchFamily="34" charset="-120"/>
-              </a:rPr>
-              <a:t> </a:t>
-            </a:r>
-            <a:r>
-              <a:rPr lang="en-US" sz="1050" dirty="0">
-                <a:solidFill>
-                  <a:srgbClr val="569CD6"/>
-                </a:solidFill>
-                <a:latin typeface="Courier New" pitchFamily="34" charset="0"/>
-                <a:ea typeface="Courier New" pitchFamily="34" charset="-122"/>
-                <a:cs typeface="Courier New" pitchFamily="34" charset="-120"/>
-              </a:rPr>
-              <a:t>create</a:t>
+              <a:t>)</a:t>
             </a:r>
             <a:r>
               <a:rPr lang="en-US" sz="1050" dirty="0">
@@ -5231,61 +5238,6 @@
                 <a:cs typeface="Courier New" pitchFamily="34" charset="-120"/>
               </a:rPr>
               <a:t>;</a:t>
-            </a:r>
-            <a:r>
-              <a:rPr lang="en-US" sz="1050" dirty="0">
-                <a:solidFill>
-                  <a:srgbClr val="CCCCCC"/>
-                </a:solidFill>
-                <a:latin typeface="Courier New" pitchFamily="34" charset="0"/>
-                <a:ea typeface="Courier New" pitchFamily="34" charset="-122"/>
-                <a:cs typeface="Courier New" pitchFamily="34" charset="-120"/>
-              </a:rPr>
-              <a:t> </a:t>
-            </a:r>
-            <a:r>
-              <a:rPr lang="en-US" sz="1050" dirty="0">
-                <a:solidFill>
-                  <a:srgbClr val="569CD6"/>
-                </a:solidFill>
-                <a:latin typeface="Courier New" pitchFamily="34" charset="0"/>
-                <a:ea typeface="Courier New" pitchFamily="34" charset="-122"/>
-                <a:cs typeface="Courier New" pitchFamily="34" charset="-120"/>
-              </a:rPr>
-              <a:t>update</a:t>
-            </a:r>
-            <a:r>
-              <a:rPr lang="en-US" sz="1050" dirty="0">
-                <a:solidFill>
-                  <a:srgbClr val="CCCCCC"/>
-                </a:solidFill>
-                <a:latin typeface="Courier New" pitchFamily="34" charset="0"/>
-                <a:ea typeface="Courier New" pitchFamily="34" charset="-122"/>
-                <a:cs typeface="Courier New" pitchFamily="34" charset="-120"/>
-              </a:rPr>
-              <a:t>;</a:t>
-            </a:r>
-            <a:r>
-              <a:rPr lang="en-US" sz="1050" dirty="0">
-                <a:solidFill>
-                  <a:srgbClr val="CCCCCC"/>
-                </a:solidFill>
-                <a:latin typeface="Courier New" pitchFamily="34" charset="0"/>
-                <a:ea typeface="Courier New" pitchFamily="34" charset="-122"/>
-                <a:cs typeface="Courier New" pitchFamily="34" charset="-120"/>
-              </a:rPr>
-              <a:t> </a:t>
-            </a:r>
-            <a:r>
-              <a:rPr lang="en-US" sz="1050" dirty="0">
-                <a:solidFill>
-                  <a:srgbClr val="CCCCCC"/>
-                </a:solidFill>
-                <a:latin typeface="Courier New" pitchFamily="34" charset="0"/>
-                <a:ea typeface="Courier New" pitchFamily="34" charset="-122"/>
-                <a:cs typeface="Courier New" pitchFamily="34" charset="-120"/>
-              </a:rPr>
-              <a:t>}</a:t>
             </a:r>
             <a:endParaRPr lang="en-US" sz="1050" dirty="0"/>
           </a:p>
@@ -5297,6 +5249,442 @@
               <a:buNone/>
             </a:pPr>
             <a:r>
+              <a:rPr lang="en-US" sz="1050" dirty="0">
+                <a:solidFill>
+                  <a:srgbClr val="CCCCCC"/>
+                </a:solidFill>
+                <a:latin typeface="Courier New" pitchFamily="34" charset="0"/>
+                <a:ea typeface="Courier New" pitchFamily="34" charset="-122"/>
+                <a:cs typeface="Courier New" pitchFamily="34" charset="-120"/>
+              </a:rPr>
+              <a:t>  </a:t>
+            </a:r>
+            <a:r>
+              <a:rPr lang="en-US" sz="1050" dirty="0">
+                <a:solidFill>
+                  <a:srgbClr val="569CD6"/>
+                </a:solidFill>
+                <a:latin typeface="Courier New" pitchFamily="34" charset="0"/>
+                <a:ea typeface="Courier New" pitchFamily="34" charset="-122"/>
+                <a:cs typeface="Courier New" pitchFamily="34" charset="-120"/>
+              </a:rPr>
+              <a:t>field</a:t>
+            </a:r>
+            <a:r>
+              <a:rPr lang="en-US" sz="1050" dirty="0">
+                <a:solidFill>
+                  <a:srgbClr val="CCCCCC"/>
+                </a:solidFill>
+                <a:latin typeface="Courier New" pitchFamily="34" charset="0"/>
+                <a:ea typeface="Courier New" pitchFamily="34" charset="-122"/>
+                <a:cs typeface="Courier New" pitchFamily="34" charset="-120"/>
+              </a:rPr>
+              <a:t> </a:t>
+            </a:r>
+            <a:r>
+              <a:rPr lang="en-US" sz="1050" dirty="0">
+                <a:solidFill>
+                  <a:srgbClr val="CCCCCC"/>
+                </a:solidFill>
+                <a:latin typeface="Courier New" pitchFamily="34" charset="0"/>
+                <a:ea typeface="Courier New" pitchFamily="34" charset="-122"/>
+                <a:cs typeface="Courier New" pitchFamily="34" charset="-120"/>
+              </a:rPr>
+              <a:t>(</a:t>
+            </a:r>
+            <a:r>
+              <a:rPr lang="en-US" sz="1050" dirty="0">
+                <a:solidFill>
+                  <a:srgbClr val="CCCCCC"/>
+                </a:solidFill>
+                <a:latin typeface="Courier New" pitchFamily="34" charset="0"/>
+                <a:ea typeface="Courier New" pitchFamily="34" charset="-122"/>
+                <a:cs typeface="Courier New" pitchFamily="34" charset="-120"/>
+              </a:rPr>
+              <a:t> </a:t>
+            </a:r>
+            <a:r>
+              <a:rPr lang="en-US" sz="1050" dirty="0">
+                <a:solidFill>
+                  <a:srgbClr val="569CD6"/>
+                </a:solidFill>
+                <a:latin typeface="Courier New" pitchFamily="34" charset="0"/>
+                <a:ea typeface="Courier New" pitchFamily="34" charset="-122"/>
+                <a:cs typeface="Courier New" pitchFamily="34" charset="-120"/>
+              </a:rPr>
+              <a:t>numbering</a:t>
+            </a:r>
+            <a:r>
+              <a:rPr lang="en-US" sz="1050" dirty="0">
+                <a:solidFill>
+                  <a:srgbClr val="CCCCCC"/>
+                </a:solidFill>
+                <a:latin typeface="Courier New" pitchFamily="34" charset="0"/>
+                <a:ea typeface="Courier New" pitchFamily="34" charset="-122"/>
+                <a:cs typeface="Courier New" pitchFamily="34" charset="-120"/>
+              </a:rPr>
+              <a:t> </a:t>
+            </a:r>
+            <a:r>
+              <a:rPr lang="en-US" sz="1050" dirty="0">
+                <a:solidFill>
+                  <a:srgbClr val="CCCCCC"/>
+                </a:solidFill>
+                <a:latin typeface="Courier New" pitchFamily="34" charset="0"/>
+                <a:ea typeface="Courier New" pitchFamily="34" charset="-122"/>
+                <a:cs typeface="Courier New" pitchFamily="34" charset="-120"/>
+              </a:rPr>
+              <a:t>:</a:t>
+            </a:r>
+            <a:r>
+              <a:rPr lang="en-US" sz="1050" dirty="0">
+                <a:solidFill>
+                  <a:srgbClr val="CCCCCC"/>
+                </a:solidFill>
+                <a:latin typeface="Courier New" pitchFamily="34" charset="0"/>
+                <a:ea typeface="Courier New" pitchFamily="34" charset="-122"/>
+                <a:cs typeface="Courier New" pitchFamily="34" charset="-120"/>
+              </a:rPr>
+              <a:t> </a:t>
+            </a:r>
+            <a:r>
+              <a:rPr lang="en-US" sz="1050" dirty="0">
+                <a:solidFill>
+                  <a:srgbClr val="569CD6"/>
+                </a:solidFill>
+                <a:latin typeface="Courier New" pitchFamily="34" charset="0"/>
+                <a:ea typeface="Courier New" pitchFamily="34" charset="-122"/>
+                <a:cs typeface="Courier New" pitchFamily="34" charset="-120"/>
+              </a:rPr>
+              <a:t>managed</a:t>
+            </a:r>
+            <a:r>
+              <a:rPr lang="en-US" sz="1050" dirty="0">
+                <a:solidFill>
+                  <a:srgbClr val="CCCCCC"/>
+                </a:solidFill>
+                <a:latin typeface="Courier New" pitchFamily="34" charset="0"/>
+                <a:ea typeface="Courier New" pitchFamily="34" charset="-122"/>
+                <a:cs typeface="Courier New" pitchFamily="34" charset="-120"/>
+              </a:rPr>
+              <a:t>,</a:t>
+            </a:r>
+            <a:r>
+              <a:rPr lang="en-US" sz="1050" dirty="0">
+                <a:solidFill>
+                  <a:srgbClr val="CCCCCC"/>
+                </a:solidFill>
+                <a:latin typeface="Courier New" pitchFamily="34" charset="0"/>
+                <a:ea typeface="Courier New" pitchFamily="34" charset="-122"/>
+                <a:cs typeface="Courier New" pitchFamily="34" charset="-120"/>
+              </a:rPr>
+              <a:t> </a:t>
+            </a:r>
+            <a:r>
+              <a:rPr lang="en-US" sz="1050" dirty="0">
+                <a:solidFill>
+                  <a:srgbClr val="569CD6"/>
+                </a:solidFill>
+                <a:latin typeface="Courier New" pitchFamily="34" charset="0"/>
+                <a:ea typeface="Courier New" pitchFamily="34" charset="-122"/>
+                <a:cs typeface="Courier New" pitchFamily="34" charset="-120"/>
+              </a:rPr>
+              <a:t>readonly</a:t>
+            </a:r>
+            <a:r>
+              <a:rPr lang="en-US" sz="1050" dirty="0">
+                <a:solidFill>
+                  <a:srgbClr val="CCCCCC"/>
+                </a:solidFill>
+                <a:latin typeface="Courier New" pitchFamily="34" charset="0"/>
+                <a:ea typeface="Courier New" pitchFamily="34" charset="-122"/>
+                <a:cs typeface="Courier New" pitchFamily="34" charset="-120"/>
+              </a:rPr>
+              <a:t> </a:t>
+            </a:r>
+            <a:r>
+              <a:rPr lang="en-US" sz="1050" dirty="0">
+                <a:solidFill>
+                  <a:srgbClr val="CCCCCC"/>
+                </a:solidFill>
+                <a:latin typeface="Courier New" pitchFamily="34" charset="0"/>
+                <a:ea typeface="Courier New" pitchFamily="34" charset="-122"/>
+                <a:cs typeface="Courier New" pitchFamily="34" charset="-120"/>
+              </a:rPr>
+              <a:t>)</a:t>
+            </a:r>
+            <a:r>
+              <a:rPr lang="en-US" sz="1050" dirty="0">
+                <a:solidFill>
+                  <a:srgbClr val="CCCCCC"/>
+                </a:solidFill>
+                <a:latin typeface="Courier New" pitchFamily="34" charset="0"/>
+                <a:ea typeface="Courier New" pitchFamily="34" charset="-122"/>
+                <a:cs typeface="Courier New" pitchFamily="34" charset="-120"/>
+              </a:rPr>
+              <a:t> </a:t>
+            </a:r>
+            <a:r>
+              <a:rPr lang="en-US" sz="1050" dirty="0">
+                <a:solidFill>
+                  <a:srgbClr val="CCCCCC"/>
+                </a:solidFill>
+                <a:latin typeface="Courier New" pitchFamily="34" charset="0"/>
+                <a:ea typeface="Courier New" pitchFamily="34" charset="-122"/>
+                <a:cs typeface="Courier New" pitchFamily="34" charset="-120"/>
+              </a:rPr>
+              <a:t>ItemUUID</a:t>
+            </a:r>
+            <a:r>
+              <a:rPr lang="en-US" sz="1050" dirty="0">
+                <a:solidFill>
+                  <a:srgbClr val="CCCCCC"/>
+                </a:solidFill>
+                <a:latin typeface="Courier New" pitchFamily="34" charset="0"/>
+                <a:ea typeface="Courier New" pitchFamily="34" charset="-122"/>
+                <a:cs typeface="Courier New" pitchFamily="34" charset="-120"/>
+              </a:rPr>
+              <a:t>;</a:t>
+            </a:r>
+            <a:endParaRPr lang="en-US" sz="1050" dirty="0"/>
+          </a:p>
+          <a:p>
+            <a:pPr indent="0" marL="0">
+              <a:lnSpc>
+                <a:spcPct val="105000"/>
+              </a:lnSpc>
+              <a:buNone/>
+            </a:pPr>
+            <a:r>
+              <a:rPr lang="en-US" sz="1050" dirty="0">
+                <a:solidFill>
+                  <a:srgbClr val="CCCCCC"/>
+                </a:solidFill>
+                <a:latin typeface="Courier New" pitchFamily="34" charset="0"/>
+                <a:ea typeface="Courier New" pitchFamily="34" charset="-122"/>
+                <a:cs typeface="Courier New" pitchFamily="34" charset="-120"/>
+              </a:rPr>
+              <a:t>  </a:t>
+            </a:r>
+            <a:r>
+              <a:rPr lang="en-US" sz="1050" dirty="0">
+                <a:solidFill>
+                  <a:srgbClr val="569CD6"/>
+                </a:solidFill>
+                <a:latin typeface="Courier New" pitchFamily="34" charset="0"/>
+                <a:ea typeface="Courier New" pitchFamily="34" charset="-122"/>
+                <a:cs typeface="Courier New" pitchFamily="34" charset="-120"/>
+              </a:rPr>
+              <a:t>validation</a:t>
+            </a:r>
+            <a:r>
+              <a:rPr lang="en-US" sz="1050" dirty="0">
+                <a:solidFill>
+                  <a:srgbClr val="CCCCCC"/>
+                </a:solidFill>
+                <a:latin typeface="Courier New" pitchFamily="34" charset="0"/>
+                <a:ea typeface="Courier New" pitchFamily="34" charset="-122"/>
+                <a:cs typeface="Courier New" pitchFamily="34" charset="-120"/>
+              </a:rPr>
+              <a:t> </a:t>
+            </a:r>
+            <a:r>
+              <a:rPr lang="en-US" sz="1050" dirty="0">
+                <a:solidFill>
+                  <a:srgbClr val="CCCCCC"/>
+                </a:solidFill>
+                <a:latin typeface="Courier New" pitchFamily="34" charset="0"/>
+                <a:ea typeface="Courier New" pitchFamily="34" charset="-122"/>
+                <a:cs typeface="Courier New" pitchFamily="34" charset="-120"/>
+              </a:rPr>
+              <a:t>ValidarSkuUnico</a:t>
+            </a:r>
+            <a:r>
+              <a:rPr lang="en-US" sz="1050" dirty="0">
+                <a:solidFill>
+                  <a:srgbClr val="CCCCCC"/>
+                </a:solidFill>
+                <a:latin typeface="Courier New" pitchFamily="34" charset="0"/>
+                <a:ea typeface="Courier New" pitchFamily="34" charset="-122"/>
+                <a:cs typeface="Courier New" pitchFamily="34" charset="-120"/>
+              </a:rPr>
+              <a:t> </a:t>
+            </a:r>
+            <a:r>
+              <a:rPr lang="en-US" sz="1050" dirty="0">
+                <a:solidFill>
+                  <a:srgbClr val="569CD6"/>
+                </a:solidFill>
+                <a:latin typeface="Courier New" pitchFamily="34" charset="0"/>
+                <a:ea typeface="Courier New" pitchFamily="34" charset="-122"/>
+                <a:cs typeface="Courier New" pitchFamily="34" charset="-120"/>
+              </a:rPr>
+              <a:t>on</a:t>
+            </a:r>
+            <a:r>
+              <a:rPr lang="en-US" sz="1050" dirty="0">
+                <a:solidFill>
+                  <a:srgbClr val="CCCCCC"/>
+                </a:solidFill>
+                <a:latin typeface="Courier New" pitchFamily="34" charset="0"/>
+                <a:ea typeface="Courier New" pitchFamily="34" charset="-122"/>
+                <a:cs typeface="Courier New" pitchFamily="34" charset="-120"/>
+              </a:rPr>
+              <a:t> </a:t>
+            </a:r>
+            <a:r>
+              <a:rPr lang="en-US" sz="1050" dirty="0">
+                <a:solidFill>
+                  <a:srgbClr val="569CD6"/>
+                </a:solidFill>
+                <a:latin typeface="Courier New" pitchFamily="34" charset="0"/>
+                <a:ea typeface="Courier New" pitchFamily="34" charset="-122"/>
+                <a:cs typeface="Courier New" pitchFamily="34" charset="-120"/>
+              </a:rPr>
+              <a:t>save</a:t>
+            </a:r>
+            <a:r>
+              <a:rPr lang="en-US" sz="1050" dirty="0">
+                <a:solidFill>
+                  <a:srgbClr val="CCCCCC"/>
+                </a:solidFill>
+                <a:latin typeface="Courier New" pitchFamily="34" charset="0"/>
+                <a:ea typeface="Courier New" pitchFamily="34" charset="-122"/>
+                <a:cs typeface="Courier New" pitchFamily="34" charset="-120"/>
+              </a:rPr>
+              <a:t> </a:t>
+            </a:r>
+            <a:r>
+              <a:rPr lang="en-US" sz="1050" dirty="0">
+                <a:solidFill>
+                  <a:srgbClr val="CCCCCC"/>
+                </a:solidFill>
+                <a:latin typeface="Courier New" pitchFamily="34" charset="0"/>
+                <a:ea typeface="Courier New" pitchFamily="34" charset="-122"/>
+                <a:cs typeface="Courier New" pitchFamily="34" charset="-120"/>
+              </a:rPr>
+              <a:t>{</a:t>
+            </a:r>
+            <a:r>
+              <a:rPr lang="en-US" sz="1050" dirty="0">
+                <a:solidFill>
+                  <a:srgbClr val="CCCCCC"/>
+                </a:solidFill>
+                <a:latin typeface="Courier New" pitchFamily="34" charset="0"/>
+                <a:ea typeface="Courier New" pitchFamily="34" charset="-122"/>
+                <a:cs typeface="Courier New" pitchFamily="34" charset="-120"/>
+              </a:rPr>
+              <a:t> </a:t>
+            </a:r>
+            <a:r>
+              <a:rPr lang="en-US" sz="1050" dirty="0">
+                <a:solidFill>
+                  <a:srgbClr val="569CD6"/>
+                </a:solidFill>
+                <a:latin typeface="Courier New" pitchFamily="34" charset="0"/>
+                <a:ea typeface="Courier New" pitchFamily="34" charset="-122"/>
+                <a:cs typeface="Courier New" pitchFamily="34" charset="-120"/>
+              </a:rPr>
+              <a:t>create</a:t>
+            </a:r>
+            <a:r>
+              <a:rPr lang="en-US" sz="1050" dirty="0">
+                <a:solidFill>
+                  <a:srgbClr val="CCCCCC"/>
+                </a:solidFill>
+                <a:latin typeface="Courier New" pitchFamily="34" charset="0"/>
+                <a:ea typeface="Courier New" pitchFamily="34" charset="-122"/>
+                <a:cs typeface="Courier New" pitchFamily="34" charset="-120"/>
+              </a:rPr>
+              <a:t>;</a:t>
+            </a:r>
+            <a:r>
+              <a:rPr lang="en-US" sz="1050" dirty="0">
+                <a:solidFill>
+                  <a:srgbClr val="CCCCCC"/>
+                </a:solidFill>
+                <a:latin typeface="Courier New" pitchFamily="34" charset="0"/>
+                <a:ea typeface="Courier New" pitchFamily="34" charset="-122"/>
+                <a:cs typeface="Courier New" pitchFamily="34" charset="-120"/>
+              </a:rPr>
+              <a:t> </a:t>
+            </a:r>
+            <a:r>
+              <a:rPr lang="en-US" sz="1050" dirty="0">
+                <a:solidFill>
+                  <a:srgbClr val="569CD6"/>
+                </a:solidFill>
+                <a:latin typeface="Courier New" pitchFamily="34" charset="0"/>
+                <a:ea typeface="Courier New" pitchFamily="34" charset="-122"/>
+                <a:cs typeface="Courier New" pitchFamily="34" charset="-120"/>
+              </a:rPr>
+              <a:t>field</a:t>
+            </a:r>
+            <a:r>
+              <a:rPr lang="en-US" sz="1050" dirty="0">
+                <a:solidFill>
+                  <a:srgbClr val="CCCCCC"/>
+                </a:solidFill>
+                <a:latin typeface="Courier New" pitchFamily="34" charset="0"/>
+                <a:ea typeface="Courier New" pitchFamily="34" charset="-122"/>
+                <a:cs typeface="Courier New" pitchFamily="34" charset="-120"/>
+              </a:rPr>
+              <a:t> </a:t>
+            </a:r>
+            <a:r>
+              <a:rPr lang="en-US" sz="1050" dirty="0">
+                <a:solidFill>
+                  <a:srgbClr val="CCCCCC"/>
+                </a:solidFill>
+                <a:latin typeface="Courier New" pitchFamily="34" charset="0"/>
+                <a:ea typeface="Courier New" pitchFamily="34" charset="-122"/>
+                <a:cs typeface="Courier New" pitchFamily="34" charset="-120"/>
+              </a:rPr>
+              <a:t>Sku</a:t>
+            </a:r>
+            <a:r>
+              <a:rPr lang="en-US" sz="1050" dirty="0">
+                <a:solidFill>
+                  <a:srgbClr val="CCCCCC"/>
+                </a:solidFill>
+                <a:latin typeface="Courier New" pitchFamily="34" charset="0"/>
+                <a:ea typeface="Courier New" pitchFamily="34" charset="-122"/>
+                <a:cs typeface="Courier New" pitchFamily="34" charset="-120"/>
+              </a:rPr>
+              <a:t>;</a:t>
+            </a:r>
+            <a:r>
+              <a:rPr lang="en-US" sz="1050" dirty="0">
+                <a:solidFill>
+                  <a:srgbClr val="CCCCCC"/>
+                </a:solidFill>
+                <a:latin typeface="Courier New" pitchFamily="34" charset="0"/>
+                <a:ea typeface="Courier New" pitchFamily="34" charset="-122"/>
+                <a:cs typeface="Courier New" pitchFamily="34" charset="-120"/>
+              </a:rPr>
+              <a:t> </a:t>
+            </a:r>
+            <a:r>
+              <a:rPr lang="en-US" sz="1050" dirty="0">
+                <a:solidFill>
+                  <a:srgbClr val="CCCCCC"/>
+                </a:solidFill>
+                <a:latin typeface="Courier New" pitchFamily="34" charset="0"/>
+                <a:ea typeface="Courier New" pitchFamily="34" charset="-122"/>
+                <a:cs typeface="Courier New" pitchFamily="34" charset="-120"/>
+              </a:rPr>
+              <a:t>}</a:t>
+            </a:r>
+            <a:endParaRPr lang="en-US" sz="1050" dirty="0"/>
+          </a:p>
+          <a:p>
+            <a:pPr indent="0" marL="0">
+              <a:lnSpc>
+                <a:spcPct val="105000"/>
+              </a:lnSpc>
+              <a:buNone/>
+            </a:pPr>
+            <a:r>
               <a:rPr lang="en-US" sz="1050" i="1" dirty="0">
                 <a:solidFill>
                   <a:srgbClr val="6A9955"/>
@@ -5305,7 +5693,7 @@
                 <a:ea typeface="Courier New" pitchFamily="34" charset="-122"/>
                 <a:cs typeface="Courier New" pitchFamily="34" charset="-120"/>
               </a:rPr>
-              <a:t>  // mapping for zconnection …</a:t>
+              <a:t>  // mapping for zta_pc_item …</a:t>
             </a:r>
             <a:endParaRPr lang="en-US" sz="1050" dirty="0"/>
           </a:p>
@@ -5681,7 +6069,7 @@
                 <a:ea typeface="Courier New" pitchFamily="34" charset="-122"/>
                 <a:cs typeface="Courier New" pitchFamily="34" charset="-120"/>
               </a:rPr>
-              <a:t>on save { create; update; }</a:t>
+              <a:t>on save { create; field Sku; }</a:t>
             </a:r>
             <a:endParaRPr lang="en-US" sz="1400" dirty="0"/>
           </a:p>
@@ -5695,7 +6083,7 @@
                   <a:srgbClr val="556B82"/>
                 </a:solidFill>
               </a:rPr>
-              <a:t>A validação roda ao gravar instâncias novas ou alteradas.</a:t>
+              <a:t>A validação roda ao gravar instâncias novas ou quando o SKU muda.</a:t>
             </a:r>
             <a:endParaRPr lang="en-US" sz="1400" dirty="0"/>
           </a:p>
@@ -6025,7 +6413,7 @@
         <p:spPr>
           <a:xfrm>
             <a:off x="640080" y="1700784"/>
-            <a:ext cx="3241548" cy="292608"/>
+            <a:ext cx="3008376" cy="292608"/>
           </a:xfrm>
           <a:prstGeom prst="rect">
             <a:avLst/>
@@ -6045,7 +6433,7 @@
         <p:spPr>
           <a:xfrm>
             <a:off x="640080" y="1700784"/>
-            <a:ext cx="3241548" cy="27432"/>
+            <a:ext cx="3008376" cy="27432"/>
           </a:xfrm>
           <a:prstGeom prst="rect">
             <a:avLst/>
@@ -6065,7 +6453,7 @@
         <p:spPr>
           <a:xfrm>
             <a:off x="731520" y="1719072"/>
-            <a:ext cx="3058668" cy="274320"/>
+            <a:ext cx="2825496" cy="274320"/>
           </a:xfrm>
           <a:prstGeom prst="rect">
             <a:avLst/>
@@ -6086,7 +6474,7 @@
                   <a:srgbClr val="FFFFFF"/>
                 </a:solidFill>
               </a:rPr>
-              <a:t>zbp_r_connection.clas.locals_imp.abap</a:t>
+              <a:t>zbp_r_pc_item.clas.locals_imp.abap</a:t>
             </a:r>
             <a:endParaRPr lang="en-US" sz="950" dirty="0"/>
           </a:p>
@@ -6122,7 +6510,7 @@
                   <a:srgbClr val="9DA5B4"/>
                 </a:solidFill>
               </a:rPr>
-              <a:t>ZBP_R_CONNECTION › Local Types › lhc_connection</a:t>
+              <a:t>ZBP_R_PC_ITEM › Local Types › lhc_item (simplificado)</a:t>
             </a:r>
             <a:endParaRPr lang="en-US" sz="850" dirty="0"/>
           </a:p>
@@ -6688,7 +7076,7 @@
                 <a:ea typeface="Courier New" pitchFamily="34" charset="-122"/>
                 <a:cs typeface="Courier New" pitchFamily="34" charset="-120"/>
               </a:rPr>
-              <a:t>CheckSemanticKey</a:t>
+              <a:t>ValidarSkuUnico</a:t>
             </a:r>
             <a:r>
               <a:rPr lang="en-US" sz="900" dirty="0">
@@ -6796,7 +7184,7 @@
                 <a:ea typeface="Courier New" pitchFamily="34" charset="-122"/>
                 <a:cs typeface="Courier New" pitchFamily="34" charset="-120"/>
               </a:rPr>
-              <a:t>z_r_connection</a:t>
+              <a:t>zr_pc_item</a:t>
             </a:r>
             <a:r>
               <a:rPr lang="en-US" sz="900" dirty="0">
@@ -6915,7 +7303,7 @@
                 <a:ea typeface="Courier New" pitchFamily="34" charset="-122"/>
                 <a:cs typeface="Courier New" pitchFamily="34" charset="-120"/>
               </a:rPr>
-              <a:t>Connection</a:t>
+              <a:t>Item</a:t>
             </a:r>
             <a:endParaRPr lang="en-US" sz="900" dirty="0"/>
           </a:p>
@@ -6990,29 +7378,7 @@
                 <a:ea typeface="Courier New" pitchFamily="34" charset="-122"/>
                 <a:cs typeface="Courier New" pitchFamily="34" charset="-120"/>
               </a:rPr>
-              <a:t>CarrierID</a:t>
-            </a:r>
-            <a:r>
-              <a:rPr lang="en-US" sz="900" dirty="0">
-                <a:solidFill>
-                  <a:srgbClr val="CCCCCC"/>
-                </a:solidFill>
-                <a:latin typeface="Courier New" pitchFamily="34" charset="0"/>
-                <a:ea typeface="Courier New" pitchFamily="34" charset="-122"/>
-                <a:cs typeface="Courier New" pitchFamily="34" charset="-120"/>
-              </a:rPr>
-              <a:t> </a:t>
-            </a:r>
-            <a:r>
-              <a:rPr lang="en-US" sz="900" dirty="0">
-                <a:solidFill>
-                  <a:srgbClr val="CCCCCC"/>
-                </a:solidFill>
-                <a:latin typeface="Courier New" pitchFamily="34" charset="0"/>
-                <a:ea typeface="Courier New" pitchFamily="34" charset="-122"/>
-                <a:cs typeface="Courier New" pitchFamily="34" charset="-120"/>
-              </a:rPr>
-              <a:t>ConnectionID</a:t>
+              <a:t>Sku</a:t>
             </a:r>
             <a:r>
               <a:rPr lang="en-US" sz="900" dirty="0">
@@ -7239,7 +7605,7 @@
                 <a:ea typeface="Courier New" pitchFamily="34" charset="-122"/>
                 <a:cs typeface="Courier New" pitchFamily="34" charset="-120"/>
               </a:rPr>
-              <a:t>connections</a:t>
+              <a:t>lt_itens</a:t>
             </a:r>
             <a:r>
               <a:rPr lang="en-US" sz="900" dirty="0">
@@ -7356,7 +7722,7 @@
                 <a:ea typeface="Courier New" pitchFamily="34" charset="-122"/>
                 <a:cs typeface="Courier New" pitchFamily="34" charset="-120"/>
               </a:rPr>
-              <a:t>connections</a:t>
+              <a:t>lt_itens</a:t>
             </a:r>
             <a:r>
               <a:rPr lang="en-US" sz="900" dirty="0">
@@ -7422,7 +7788,7 @@
                 <a:ea typeface="Courier New" pitchFamily="34" charset="-122"/>
                 <a:cs typeface="Courier New" pitchFamily="34" charset="-120"/>
               </a:rPr>
-              <a:t>connection</a:t>
+              <a:t>ls_item</a:t>
             </a:r>
             <a:r>
               <a:rPr lang="en-US" sz="900" dirty="0">
@@ -7513,72 +7879,6 @@
             <a:r>
               <a:rPr lang="en-US" sz="900" dirty="0">
                 <a:solidFill>
-                  <a:srgbClr val="569CD6"/>
-                </a:solidFill>
-                <a:latin typeface="Courier New" pitchFamily="34" charset="0"/>
-                <a:ea typeface="Courier New" pitchFamily="34" charset="-122"/>
-                <a:cs typeface="Courier New" pitchFamily="34" charset="-120"/>
-              </a:rPr>
-              <a:t>FROM</a:t>
-            </a:r>
-            <a:r>
-              <a:rPr lang="en-US" sz="900" dirty="0">
-                <a:solidFill>
-                  <a:srgbClr val="CCCCCC"/>
-                </a:solidFill>
-                <a:latin typeface="Courier New" pitchFamily="34" charset="0"/>
-                <a:ea typeface="Courier New" pitchFamily="34" charset="-122"/>
-                <a:cs typeface="Courier New" pitchFamily="34" charset="-120"/>
-              </a:rPr>
-              <a:t> </a:t>
-            </a:r>
-            <a:r>
-              <a:rPr lang="en-US" sz="900" dirty="0">
-                <a:solidFill>
-                  <a:srgbClr val="CCCCCC"/>
-                </a:solidFill>
-                <a:latin typeface="Courier New" pitchFamily="34" charset="0"/>
-                <a:ea typeface="Courier New" pitchFamily="34" charset="-122"/>
-                <a:cs typeface="Courier New" pitchFamily="34" charset="-120"/>
-              </a:rPr>
-              <a:t>zconnection</a:t>
-            </a:r>
-            <a:r>
-              <a:rPr lang="en-US" sz="900" dirty="0">
-                <a:solidFill>
-                  <a:srgbClr val="CCCCCC"/>
-                </a:solidFill>
-                <a:latin typeface="Courier New" pitchFamily="34" charset="0"/>
-                <a:ea typeface="Courier New" pitchFamily="34" charset="-122"/>
-                <a:cs typeface="Courier New" pitchFamily="34" charset="-120"/>
-              </a:rPr>
-              <a:t> </a:t>
-            </a:r>
-            <a:r>
-              <a:rPr lang="en-US" sz="900" dirty="0">
-                <a:solidFill>
-                  <a:srgbClr val="569CD6"/>
-                </a:solidFill>
-                <a:latin typeface="Courier New" pitchFamily="34" charset="0"/>
-                <a:ea typeface="Courier New" pitchFamily="34" charset="-122"/>
-                <a:cs typeface="Courier New" pitchFamily="34" charset="-120"/>
-              </a:rPr>
-              <a:t>FIELDS</a:t>
-            </a:r>
-            <a:r>
-              <a:rPr lang="en-US" sz="900" dirty="0">
-                <a:solidFill>
-                  <a:srgbClr val="CCCCCC"/>
-                </a:solidFill>
-                <a:latin typeface="Courier New" pitchFamily="34" charset="0"/>
-                <a:ea typeface="Courier New" pitchFamily="34" charset="-122"/>
-                <a:cs typeface="Courier New" pitchFamily="34" charset="-120"/>
-              </a:rPr>
-              <a:t> </a:t>
-            </a:r>
-            <a:r>
-              <a:rPr lang="en-US" sz="900" dirty="0">
-                <a:solidFill>
                   <a:srgbClr val="CCCCCC"/>
                 </a:solidFill>
                 <a:latin typeface="Courier New" pitchFamily="34" charset="0"/>
@@ -7627,7 +7927,7 @@
                 <a:ea typeface="Courier New" pitchFamily="34" charset="-122"/>
                 <a:cs typeface="Courier New" pitchFamily="34" charset="-120"/>
               </a:rPr>
-              <a:t>WHERE</a:t>
+              <a:t>FROM</a:t>
             </a:r>
             <a:r>
               <a:rPr lang="en-US" sz="900" dirty="0">
@@ -7649,62 +7949,7 @@
                 <a:ea typeface="Courier New" pitchFamily="34" charset="-122"/>
                 <a:cs typeface="Courier New" pitchFamily="34" charset="-120"/>
               </a:rPr>
-              <a:t>carrier_id</a:t>
-            </a:r>
-            <a:r>
-              <a:rPr lang="en-US" sz="900" dirty="0">
-                <a:solidFill>
-                  <a:srgbClr val="CCCCCC"/>
-                </a:solidFill>
-                <a:latin typeface="Courier New" pitchFamily="34" charset="0"/>
-                <a:ea typeface="Courier New" pitchFamily="34" charset="-122"/>
-                <a:cs typeface="Courier New" pitchFamily="34" charset="-120"/>
-              </a:rPr>
-              <a:t>    </a:t>
-            </a:r>
-            <a:r>
-              <a:rPr lang="en-US" sz="900" dirty="0">
-                <a:solidFill>
-                  <a:srgbClr val="CCCCCC"/>
-                </a:solidFill>
-                <a:latin typeface="Courier New" pitchFamily="34" charset="0"/>
-                <a:ea typeface="Courier New" pitchFamily="34" charset="-122"/>
-                <a:cs typeface="Courier New" pitchFamily="34" charset="-120"/>
-              </a:rPr>
-              <a:t>=</a:t>
-            </a:r>
-            <a:r>
-              <a:rPr lang="en-US" sz="900" dirty="0">
-                <a:solidFill>
-                  <a:srgbClr val="CCCCCC"/>
-                </a:solidFill>
-                <a:latin typeface="Courier New" pitchFamily="34" charset="0"/>
-                <a:ea typeface="Courier New" pitchFamily="34" charset="-122"/>
-                <a:cs typeface="Courier New" pitchFamily="34" charset="-120"/>
-              </a:rPr>
-              <a:t> </a:t>
-            </a:r>
-            <a:r>
-              <a:rPr lang="en-US" sz="900" dirty="0">
-                <a:solidFill>
-                  <a:srgbClr val="CCCCCC"/>
-                </a:solidFill>
-                <a:latin typeface="Courier New" pitchFamily="34" charset="0"/>
-                <a:ea typeface="Courier New" pitchFamily="34" charset="-122"/>
-                <a:cs typeface="Courier New" pitchFamily="34" charset="-120"/>
-              </a:rPr>
-              <a:t>@</a:t>
-            </a:r>
-            <a:r>
-              <a:rPr lang="en-US" sz="900" dirty="0">
-                <a:solidFill>
-                  <a:srgbClr val="CCCCCC"/>
-                </a:solidFill>
-                <a:latin typeface="Courier New" pitchFamily="34" charset="0"/>
-                <a:ea typeface="Courier New" pitchFamily="34" charset="-122"/>
-                <a:cs typeface="Courier New" pitchFamily="34" charset="-120"/>
-              </a:rPr>
-              <a:t>connection-CarrierID</a:t>
+              <a:t>zta_pc_item</a:t>
             </a:r>
             <a:endParaRPr lang="en-US" sz="900" dirty="0"/>
           </a:p>
@@ -7724,7 +7969,7 @@
                 <a:ea typeface="Courier New" pitchFamily="34" charset="-122"/>
                 <a:cs typeface="Courier New" pitchFamily="34" charset="-120"/>
               </a:rPr>
-              <a:t>        </a:t>
+              <a:t>      </a:t>
             </a:r>
             <a:r>
               <a:rPr lang="en-US" sz="900" dirty="0">
@@ -7735,7 +7980,7 @@
                 <a:ea typeface="Courier New" pitchFamily="34" charset="-122"/>
                 <a:cs typeface="Courier New" pitchFamily="34" charset="-120"/>
               </a:rPr>
-              <a:t>AND</a:t>
+              <a:t>WHERE</a:t>
             </a:r>
             <a:r>
               <a:rPr lang="en-US" sz="900" dirty="0">
@@ -7757,7 +8002,7 @@
                 <a:ea typeface="Courier New" pitchFamily="34" charset="-122"/>
                 <a:cs typeface="Courier New" pitchFamily="34" charset="-120"/>
               </a:rPr>
-              <a:t>connection_id</a:t>
+              <a:t>sku</a:t>
             </a:r>
             <a:r>
               <a:rPr lang="en-US" sz="900" dirty="0">
@@ -7768,7 +8013,7 @@
                 <a:ea typeface="Courier New" pitchFamily="34" charset="-122"/>
                 <a:cs typeface="Courier New" pitchFamily="34" charset="-120"/>
               </a:rPr>
-              <a:t> </a:t>
+              <a:t>       </a:t>
             </a:r>
             <a:r>
               <a:rPr lang="en-US" sz="900" dirty="0">
@@ -7790,7 +8035,7 @@
                 <a:ea typeface="Courier New" pitchFamily="34" charset="-122"/>
                 <a:cs typeface="Courier New" pitchFamily="34" charset="-120"/>
               </a:rPr>
-              <a:t> </a:t>
+              <a:t>  </a:t>
             </a:r>
             <a:r>
               <a:rPr lang="en-US" sz="900" dirty="0">
@@ -7812,7 +8057,7 @@
                 <a:ea typeface="Courier New" pitchFamily="34" charset="-122"/>
                 <a:cs typeface="Courier New" pitchFamily="34" charset="-120"/>
               </a:rPr>
-              <a:t>connection-ConnectionID</a:t>
+              <a:t>ls_item-Sku</a:t>
             </a:r>
             <a:endParaRPr lang="en-US" sz="900" dirty="0"/>
           </a:p>
@@ -7865,7 +8110,7 @@
                 <a:ea typeface="Courier New" pitchFamily="34" charset="-122"/>
                 <a:cs typeface="Courier New" pitchFamily="34" charset="-120"/>
               </a:rPr>
-              <a:t>uuid</a:t>
+              <a:t>item_uuid</a:t>
             </a:r>
             <a:r>
               <a:rPr lang="en-US" sz="900" dirty="0">
@@ -7876,7 +8121,7 @@
                 <a:ea typeface="Courier New" pitchFamily="34" charset="-122"/>
                 <a:cs typeface="Courier New" pitchFamily="34" charset="-120"/>
               </a:rPr>
-              <a:t>         </a:t>
+              <a:t> </a:t>
             </a:r>
             <a:r>
               <a:rPr lang="en-US" sz="900" dirty="0">
@@ -7931,7 +8176,7 @@
                 <a:ea typeface="Courier New" pitchFamily="34" charset="-122"/>
                 <a:cs typeface="Courier New" pitchFamily="34" charset="-120"/>
               </a:rPr>
-              <a:t>connection-Uuid</a:t>
+              <a:t>ls_item-ItemUUID</a:t>
             </a:r>
             <a:endParaRPr lang="en-US" sz="900" dirty="0"/>
           </a:p>
@@ -8017,7 +8262,7 @@
                 <a:ea typeface="Courier New" pitchFamily="34" charset="-122"/>
                 <a:cs typeface="Courier New" pitchFamily="34" charset="-120"/>
               </a:rPr>
-              <a:t>exists</a:t>
+              <a:t>lv_duplicado</a:t>
             </a:r>
             <a:r>
               <a:rPr lang="en-US" sz="900" dirty="0">
@@ -8092,7 +8337,7 @@
                 <a:ea typeface="Courier New" pitchFamily="34" charset="-122"/>
                 <a:cs typeface="Courier New" pitchFamily="34" charset="-120"/>
               </a:rPr>
-              <a:t>exists</a:t>
+              <a:t>lv_duplicado</a:t>
             </a:r>
             <a:r>
               <a:rPr lang="en-US" sz="900" dirty="0">
@@ -8310,7 +8555,7 @@
                 <a:ea typeface="Courier New" pitchFamily="34" charset="-122"/>
                 <a:cs typeface="Courier New" pitchFamily="34" charset="-120"/>
               </a:rPr>
-              <a:t>connection-</a:t>
+              <a:t>ls_item-</a:t>
             </a:r>
             <a:r>
               <a:rPr lang="en-US" sz="900" dirty="0">
@@ -8398,7 +8643,7 @@
                 <a:ea typeface="Courier New" pitchFamily="34" charset="-122"/>
                 <a:cs typeface="Courier New" pitchFamily="34" charset="-120"/>
               </a:rPr>
-              <a:t>failed-connection</a:t>
+              <a:t>failed-item</a:t>
             </a:r>
             <a:r>
               <a:rPr lang="en-US" sz="900" dirty="0">
@@ -8572,7 +8817,7 @@
                 <a:ea typeface="Courier New" pitchFamily="34" charset="-122"/>
                 <a:cs typeface="Courier New" pitchFamily="34" charset="-120"/>
               </a:rPr>
-              <a:t>connection-</a:t>
+              <a:t>ls_item-</a:t>
             </a:r>
             <a:r>
               <a:rPr lang="en-US" sz="900" dirty="0">
@@ -8674,13 +8919,35 @@
             <a:r>
               <a:rPr lang="en-US" sz="900" dirty="0">
                 <a:solidFill>
-                  <a:srgbClr val="CCCCCC"/>
-                </a:solidFill>
-                <a:latin typeface="Courier New" pitchFamily="34" charset="0"/>
-                <a:ea typeface="Courier New" pitchFamily="34" charset="-122"/>
-                <a:cs typeface="Courier New" pitchFamily="34" charset="-120"/>
-              </a:rPr>
-              <a:t>new_message</a:t>
+                  <a:srgbClr val="569CD6"/>
+                </a:solidFill>
+                <a:latin typeface="Courier New" pitchFamily="34" charset="0"/>
+                <a:ea typeface="Courier New" pitchFamily="34" charset="-122"/>
+                <a:cs typeface="Courier New" pitchFamily="34" charset="-120"/>
+              </a:rPr>
+              <a:t>NEW</a:t>
+            </a:r>
+            <a:r>
+              <a:rPr lang="en-US" sz="900" dirty="0">
+                <a:solidFill>
+                  <a:srgbClr val="CCCCCC"/>
+                </a:solidFill>
+                <a:latin typeface="Courier New" pitchFamily="34" charset="0"/>
+                <a:ea typeface="Courier New" pitchFamily="34" charset="-122"/>
+                <a:cs typeface="Courier New" pitchFamily="34" charset="-120"/>
+              </a:rPr>
+              <a:t> </a:t>
+            </a:r>
+            <a:r>
+              <a:rPr lang="en-US" sz="900" dirty="0">
+                <a:solidFill>
+                  <a:srgbClr val="4EC9B0"/>
+                </a:solidFill>
+                <a:latin typeface="Courier New" pitchFamily="34" charset="0"/>
+                <a:ea typeface="Courier New" pitchFamily="34" charset="-122"/>
+                <a:cs typeface="Courier New" pitchFamily="34" charset="-120"/>
+              </a:rPr>
+              <a:t>zcx_pc_msg</a:t>
             </a:r>
             <a:r>
               <a:rPr lang="en-US" sz="900" dirty="0">
@@ -8711,7 +8978,7 @@
                 <a:ea typeface="Courier New" pitchFamily="34" charset="-122"/>
                 <a:cs typeface="Courier New" pitchFamily="34" charset="-120"/>
               </a:rPr>
-              <a:t>                        </a:t>
+              <a:t>                               </a:t>
             </a:r>
             <a:r>
               <a:rPr lang="en-US" sz="900" dirty="0">
@@ -8722,7 +8989,7 @@
                 <a:ea typeface="Courier New" pitchFamily="34" charset="-122"/>
                 <a:cs typeface="Courier New" pitchFamily="34" charset="-120"/>
               </a:rPr>
-              <a:t>id</a:t>
+              <a:t>textid</a:t>
             </a:r>
             <a:r>
               <a:rPr lang="en-US" sz="900" dirty="0">
@@ -8760,13 +9027,13 @@
             <a:r>
               <a:rPr lang="en-US" sz="900" dirty="0">
                 <a:solidFill>
-                  <a:srgbClr val="CE9178"/>
-                </a:solidFill>
-                <a:latin typeface="Courier New" pitchFamily="34" charset="0"/>
-                <a:ea typeface="Courier New" pitchFamily="34" charset="-122"/>
-                <a:cs typeface="Courier New" pitchFamily="34" charset="-120"/>
-              </a:rPr>
-              <a:t>'ZS4D400'</a:t>
+                  <a:srgbClr val="4EC9B0"/>
+                </a:solidFill>
+                <a:latin typeface="Courier New" pitchFamily="34" charset="0"/>
+                <a:ea typeface="Courier New" pitchFamily="34" charset="-122"/>
+                <a:cs typeface="Courier New" pitchFamily="34" charset="-120"/>
+              </a:rPr>
+              <a:t>zif_pc_msg=&gt;</a:t>
             </a:r>
             <a:r>
               <a:rPr lang="en-US" sz="900" dirty="0">
@@ -8777,6 +9044,17 @@
                 <a:ea typeface="Courier New" pitchFamily="34" charset="-122"/>
                 <a:cs typeface="Courier New" pitchFamily="34" charset="-120"/>
               </a:rPr>
+              <a:t>item_sku_duplicado</a:t>
+            </a:r>
+            <a:r>
+              <a:rPr lang="en-US" sz="900" dirty="0">
+                <a:solidFill>
+                  <a:srgbClr val="CCCCCC"/>
+                </a:solidFill>
+                <a:latin typeface="Courier New" pitchFamily="34" charset="0"/>
+                <a:ea typeface="Courier New" pitchFamily="34" charset="-122"/>
+                <a:cs typeface="Courier New" pitchFamily="34" charset="-120"/>
+              </a:rPr>
               <a:t> </a:t>
             </a:r>
             <a:r>
@@ -8788,51 +9066,7 @@
                 <a:ea typeface="Courier New" pitchFamily="34" charset="-122"/>
                 <a:cs typeface="Courier New" pitchFamily="34" charset="-120"/>
               </a:rPr>
-              <a:t>number</a:t>
-            </a:r>
-            <a:r>
-              <a:rPr lang="en-US" sz="900" dirty="0">
-                <a:solidFill>
-                  <a:srgbClr val="CCCCCC"/>
-                </a:solidFill>
-                <a:latin typeface="Courier New" pitchFamily="34" charset="0"/>
-                <a:ea typeface="Courier New" pitchFamily="34" charset="-122"/>
-                <a:cs typeface="Courier New" pitchFamily="34" charset="-120"/>
-              </a:rPr>
-              <a:t> </a:t>
-            </a:r>
-            <a:r>
-              <a:rPr lang="en-US" sz="900" dirty="0">
-                <a:solidFill>
-                  <a:srgbClr val="CCCCCC"/>
-                </a:solidFill>
-                <a:latin typeface="Courier New" pitchFamily="34" charset="0"/>
-                <a:ea typeface="Courier New" pitchFamily="34" charset="-122"/>
-                <a:cs typeface="Courier New" pitchFamily="34" charset="-120"/>
-              </a:rPr>
-              <a:t>=</a:t>
-            </a:r>
-            <a:r>
-              <a:rPr lang="en-US" sz="900" dirty="0">
-                <a:solidFill>
-                  <a:srgbClr val="CCCCCC"/>
-                </a:solidFill>
-                <a:latin typeface="Courier New" pitchFamily="34" charset="0"/>
-                <a:ea typeface="Courier New" pitchFamily="34" charset="-122"/>
-                <a:cs typeface="Courier New" pitchFamily="34" charset="-120"/>
-              </a:rPr>
-              <a:t> </a:t>
-            </a:r>
-            <a:r>
-              <a:rPr lang="en-US" sz="900" dirty="0">
-                <a:solidFill>
-                  <a:srgbClr val="CE9178"/>
-                </a:solidFill>
-                <a:latin typeface="Courier New" pitchFamily="34" charset="0"/>
-                <a:ea typeface="Courier New" pitchFamily="34" charset="-122"/>
-                <a:cs typeface="Courier New" pitchFamily="34" charset="-120"/>
-              </a:rPr>
-              <a:t>'001'</a:t>
+              <a:t>)</a:t>
             </a:r>
             <a:endParaRPr lang="en-US" sz="900" dirty="0"/>
           </a:p>
@@ -8852,7 +9086,7 @@
                 <a:ea typeface="Courier New" pitchFamily="34" charset="-122"/>
                 <a:cs typeface="Courier New" pitchFamily="34" charset="-120"/>
               </a:rPr>
-              <a:t>                        </a:t>
+              <a:t>                      </a:t>
             </a:r>
             <a:r>
               <a:rPr lang="en-US" sz="900" dirty="0">
@@ -8863,7 +9097,7 @@
                 <a:ea typeface="Courier New" pitchFamily="34" charset="-122"/>
                 <a:cs typeface="Courier New" pitchFamily="34" charset="-120"/>
               </a:rPr>
-              <a:t>severity</a:t>
+              <a:t>%</a:t>
             </a:r>
             <a:r>
               <a:rPr lang="en-US" sz="900" dirty="0">
@@ -8874,6 +9108,17 @@
                 <a:ea typeface="Courier New" pitchFamily="34" charset="-122"/>
                 <a:cs typeface="Courier New" pitchFamily="34" charset="-120"/>
               </a:rPr>
+              <a:t>element-Sku</a:t>
+            </a:r>
+            <a:r>
+              <a:rPr lang="en-US" sz="900" dirty="0">
+                <a:solidFill>
+                  <a:srgbClr val="CCCCCC"/>
+                </a:solidFill>
+                <a:latin typeface="Courier New" pitchFamily="34" charset="0"/>
+                <a:ea typeface="Courier New" pitchFamily="34" charset="-122"/>
+                <a:cs typeface="Courier New" pitchFamily="34" charset="-120"/>
+              </a:rPr>
               <a:t> </a:t>
             </a:r>
             <a:r>
@@ -8907,7 +9152,7 @@
                 <a:ea typeface="Courier New" pitchFamily="34" charset="-122"/>
                 <a:cs typeface="Courier New" pitchFamily="34" charset="-120"/>
               </a:rPr>
-              <a:t>if_abap_behv_message=&gt;</a:t>
+              <a:t>if_abap_behv=&gt;</a:t>
             </a:r>
             <a:r>
               <a:rPr lang="en-US" sz="900" dirty="0">
@@ -8918,7 +9163,29 @@
                 <a:ea typeface="Courier New" pitchFamily="34" charset="-122"/>
                 <a:cs typeface="Courier New" pitchFamily="34" charset="-120"/>
               </a:rPr>
-              <a:t>severity-error</a:t>
+              <a:t>mk-on</a:t>
+            </a:r>
+            <a:r>
+              <a:rPr lang="en-US" sz="900" dirty="0">
+                <a:solidFill>
+                  <a:srgbClr val="CCCCCC"/>
+                </a:solidFill>
+                <a:latin typeface="Courier New" pitchFamily="34" charset="0"/>
+                <a:ea typeface="Courier New" pitchFamily="34" charset="-122"/>
+                <a:cs typeface="Courier New" pitchFamily="34" charset="-120"/>
+              </a:rPr>
+              <a:t> </a:t>
+            </a:r>
+            <a:r>
+              <a:rPr lang="en-US" sz="900" dirty="0">
+                <a:solidFill>
+                  <a:srgbClr val="CCCCCC"/>
+                </a:solidFill>
+                <a:latin typeface="Courier New" pitchFamily="34" charset="0"/>
+                <a:ea typeface="Courier New" pitchFamily="34" charset="-122"/>
+                <a:cs typeface="Courier New" pitchFamily="34" charset="-120"/>
+              </a:rPr>
+              <a:t>)</a:t>
             </a:r>
             <a:endParaRPr lang="en-US" sz="900" dirty="0"/>
           </a:p>
@@ -8938,18 +9205,18 @@
                 <a:ea typeface="Courier New" pitchFamily="34" charset="-122"/>
                 <a:cs typeface="Courier New" pitchFamily="34" charset="-120"/>
               </a:rPr>
-              <a:t>                        </a:t>
+              <a:t>             </a:t>
             </a:r>
             <a:r>
               <a:rPr lang="en-US" sz="900" dirty="0">
                 <a:solidFill>
-                  <a:srgbClr val="CCCCCC"/>
-                </a:solidFill>
-                <a:latin typeface="Courier New" pitchFamily="34" charset="0"/>
-                <a:ea typeface="Courier New" pitchFamily="34" charset="-122"/>
-                <a:cs typeface="Courier New" pitchFamily="34" charset="-120"/>
-              </a:rPr>
-              <a:t>v1</a:t>
+                  <a:srgbClr val="569CD6"/>
+                </a:solidFill>
+                <a:latin typeface="Courier New" pitchFamily="34" charset="0"/>
+                <a:ea typeface="Courier New" pitchFamily="34" charset="-122"/>
+                <a:cs typeface="Courier New" pitchFamily="34" charset="-120"/>
+              </a:rPr>
+              <a:t>TO</a:t>
             </a:r>
             <a:r>
               <a:rPr lang="en-US" sz="900" dirty="0">
@@ -8971,7 +9238,7 @@
                 <a:ea typeface="Courier New" pitchFamily="34" charset="-122"/>
                 <a:cs typeface="Courier New" pitchFamily="34" charset="-120"/>
               </a:rPr>
-              <a:t>=</a:t>
+              <a:t>reported-item</a:t>
             </a:r>
             <a:r>
               <a:rPr lang="en-US" sz="900" dirty="0">
@@ -8982,128 +9249,7 @@
                 <a:ea typeface="Courier New" pitchFamily="34" charset="-122"/>
                 <a:cs typeface="Courier New" pitchFamily="34" charset="-120"/>
               </a:rPr>
-              <a:t> </a:t>
-            </a:r>
-            <a:r>
-              <a:rPr lang="en-US" sz="900" dirty="0">
-                <a:solidFill>
-                  <a:srgbClr val="CCCCCC"/>
-                </a:solidFill>
-                <a:latin typeface="Courier New" pitchFamily="34" charset="0"/>
-                <a:ea typeface="Courier New" pitchFamily="34" charset="-122"/>
-                <a:cs typeface="Courier New" pitchFamily="34" charset="-120"/>
-              </a:rPr>
-              <a:t>connection-CarrierID</a:t>
-            </a:r>
-            <a:r>
-              <a:rPr lang="en-US" sz="900" dirty="0">
-                <a:solidFill>
-                  <a:srgbClr val="CCCCCC"/>
-                </a:solidFill>
-                <a:latin typeface="Courier New" pitchFamily="34" charset="0"/>
-                <a:ea typeface="Courier New" pitchFamily="34" charset="-122"/>
-                <a:cs typeface="Courier New" pitchFamily="34" charset="-120"/>
-              </a:rPr>
-              <a:t> </a:t>
-            </a:r>
-            <a:r>
-              <a:rPr lang="en-US" sz="900" dirty="0">
-                <a:solidFill>
-                  <a:srgbClr val="CCCCCC"/>
-                </a:solidFill>
-                <a:latin typeface="Courier New" pitchFamily="34" charset="0"/>
-                <a:ea typeface="Courier New" pitchFamily="34" charset="-122"/>
-                <a:cs typeface="Courier New" pitchFamily="34" charset="-120"/>
-              </a:rPr>
-              <a:t>v2</a:t>
-            </a:r>
-            <a:r>
-              <a:rPr lang="en-US" sz="900" dirty="0">
-                <a:solidFill>
-                  <a:srgbClr val="CCCCCC"/>
-                </a:solidFill>
-                <a:latin typeface="Courier New" pitchFamily="34" charset="0"/>
-                <a:ea typeface="Courier New" pitchFamily="34" charset="-122"/>
-                <a:cs typeface="Courier New" pitchFamily="34" charset="-120"/>
-              </a:rPr>
-              <a:t> </a:t>
-            </a:r>
-            <a:r>
-              <a:rPr lang="en-US" sz="900" dirty="0">
-                <a:solidFill>
-                  <a:srgbClr val="CCCCCC"/>
-                </a:solidFill>
-                <a:latin typeface="Courier New" pitchFamily="34" charset="0"/>
-                <a:ea typeface="Courier New" pitchFamily="34" charset="-122"/>
-                <a:cs typeface="Courier New" pitchFamily="34" charset="-120"/>
-              </a:rPr>
-              <a:t>=</a:t>
-            </a:r>
-            <a:r>
-              <a:rPr lang="en-US" sz="900" dirty="0">
-                <a:solidFill>
-                  <a:srgbClr val="CCCCCC"/>
-                </a:solidFill>
-                <a:latin typeface="Courier New" pitchFamily="34" charset="0"/>
-                <a:ea typeface="Courier New" pitchFamily="34" charset="-122"/>
-                <a:cs typeface="Courier New" pitchFamily="34" charset="-120"/>
-              </a:rPr>
-              <a:t> </a:t>
-            </a:r>
-            <a:r>
-              <a:rPr lang="en-US" sz="900" dirty="0">
-                <a:solidFill>
-                  <a:srgbClr val="CCCCCC"/>
-                </a:solidFill>
-                <a:latin typeface="Courier New" pitchFamily="34" charset="0"/>
-                <a:ea typeface="Courier New" pitchFamily="34" charset="-122"/>
-                <a:cs typeface="Courier New" pitchFamily="34" charset="-120"/>
-              </a:rPr>
-              <a:t>connection-ConnectionID</a:t>
-            </a:r>
-            <a:r>
-              <a:rPr lang="en-US" sz="900" dirty="0">
-                <a:solidFill>
-                  <a:srgbClr val="CCCCCC"/>
-                </a:solidFill>
-                <a:latin typeface="Courier New" pitchFamily="34" charset="0"/>
-                <a:ea typeface="Courier New" pitchFamily="34" charset="-122"/>
-                <a:cs typeface="Courier New" pitchFamily="34" charset="-120"/>
-              </a:rPr>
-              <a:t> </a:t>
-            </a:r>
-            <a:r>
-              <a:rPr lang="en-US" sz="900" dirty="0">
-                <a:solidFill>
-                  <a:srgbClr val="CCCCCC"/>
-                </a:solidFill>
-                <a:latin typeface="Courier New" pitchFamily="34" charset="0"/>
-                <a:ea typeface="Courier New" pitchFamily="34" charset="-122"/>
-                <a:cs typeface="Courier New" pitchFamily="34" charset="-120"/>
-              </a:rPr>
-              <a:t>)</a:t>
-            </a:r>
-            <a:r>
-              <a:rPr lang="en-US" sz="900" dirty="0">
-                <a:solidFill>
-                  <a:srgbClr val="CCCCCC"/>
-                </a:solidFill>
-                <a:latin typeface="Courier New" pitchFamily="34" charset="0"/>
-                <a:ea typeface="Courier New" pitchFamily="34" charset="-122"/>
-                <a:cs typeface="Courier New" pitchFamily="34" charset="-120"/>
-              </a:rPr>
-              <a:t> </a:t>
-            </a:r>
-            <a:r>
-              <a:rPr lang="en-US" sz="900" dirty="0">
-                <a:solidFill>
-                  <a:srgbClr val="CCCCCC"/>
-                </a:solidFill>
-                <a:latin typeface="Courier New" pitchFamily="34" charset="0"/>
-                <a:ea typeface="Courier New" pitchFamily="34" charset="-122"/>
-                <a:cs typeface="Courier New" pitchFamily="34" charset="-120"/>
-              </a:rPr>
-              <a:t>)</a:t>
+              <a:t>.</a:t>
             </a:r>
             <a:endParaRPr lang="en-US" sz="900" dirty="0"/>
           </a:p>
@@ -9123,7 +9269,7 @@
                 <a:ea typeface="Courier New" pitchFamily="34" charset="-122"/>
                 <a:cs typeface="Courier New" pitchFamily="34" charset="-120"/>
               </a:rPr>
-              <a:t>             </a:t>
+              <a:t>    </a:t>
             </a:r>
             <a:r>
               <a:rPr lang="en-US" sz="900" dirty="0">
@@ -9134,29 +9280,7 @@
                 <a:ea typeface="Courier New" pitchFamily="34" charset="-122"/>
                 <a:cs typeface="Courier New" pitchFamily="34" charset="-120"/>
               </a:rPr>
-              <a:t>TO</a:t>
-            </a:r>
-            <a:r>
-              <a:rPr lang="en-US" sz="900" dirty="0">
-                <a:solidFill>
-                  <a:srgbClr val="CCCCCC"/>
-                </a:solidFill>
-                <a:latin typeface="Courier New" pitchFamily="34" charset="0"/>
-                <a:ea typeface="Courier New" pitchFamily="34" charset="-122"/>
-                <a:cs typeface="Courier New" pitchFamily="34" charset="-120"/>
-              </a:rPr>
-              <a:t> </a:t>
-            </a:r>
-            <a:r>
-              <a:rPr lang="en-US" sz="900" dirty="0">
-                <a:solidFill>
-                  <a:srgbClr val="CCCCCC"/>
-                </a:solidFill>
-                <a:latin typeface="Courier New" pitchFamily="34" charset="0"/>
-                <a:ea typeface="Courier New" pitchFamily="34" charset="-122"/>
-                <a:cs typeface="Courier New" pitchFamily="34" charset="-120"/>
-              </a:rPr>
-              <a:t>reported-connection</a:t>
+              <a:t>ENDIF</a:t>
             </a:r>
             <a:r>
               <a:rPr lang="en-US" sz="900" dirty="0">
@@ -9198,7 +9322,29 @@
                 <a:ea typeface="Courier New" pitchFamily="34" charset="-122"/>
                 <a:cs typeface="Courier New" pitchFamily="34" charset="-120"/>
               </a:rPr>
-              <a:t>ENDIF</a:t>
+              <a:t>CLEAR</a:t>
+            </a:r>
+            <a:r>
+              <a:rPr lang="en-US" sz="900" dirty="0">
+                <a:solidFill>
+                  <a:srgbClr val="CCCCCC"/>
+                </a:solidFill>
+                <a:latin typeface="Courier New" pitchFamily="34" charset="0"/>
+                <a:ea typeface="Courier New" pitchFamily="34" charset="-122"/>
+                <a:cs typeface="Courier New" pitchFamily="34" charset="-120"/>
+              </a:rPr>
+              <a:t> </a:t>
+            </a:r>
+            <a:r>
+              <a:rPr lang="en-US" sz="900" dirty="0">
+                <a:solidFill>
+                  <a:srgbClr val="CCCCCC"/>
+                </a:solidFill>
+                <a:latin typeface="Courier New" pitchFamily="34" charset="0"/>
+                <a:ea typeface="Courier New" pitchFamily="34" charset="-122"/>
+                <a:cs typeface="Courier New" pitchFamily="34" charset="-120"/>
+              </a:rPr>
+              <a:t>lv_duplicado</a:t>
             </a:r>
             <a:r>
               <a:rPr lang="en-US" sz="900" dirty="0">
@@ -9780,7 +9926,7 @@
                   <a:srgbClr val="556B82"/>
                 </a:solidFill>
               </a:rPr>
-              <a:t>Mensagem da message class, com até 4 placeholders </a:t>
+              <a:t>Mensagem 010 da message class </a:t>
             </a:r>
             <a:r>
               <a:rPr lang="en-US" sz="1050" dirty="0">
@@ -9791,7 +9937,7 @@
                 <a:ea typeface="Courier New" pitchFamily="34" charset="-122"/>
                 <a:cs typeface="Courier New" pitchFamily="34" charset="-120"/>
               </a:rPr>
-              <a:t>&amp;1</a:t>
+              <a:t>ZPC_MSG</a:t>
             </a:r>
             <a:r>
               <a:rPr lang="en-US" sz="1050" dirty="0">
@@ -9799,7 +9945,7 @@
                   <a:srgbClr val="556B82"/>
                 </a:solidFill>
               </a:rPr>
-              <a:t>…</a:t>
+              <a:t>, via a classe </a:t>
             </a:r>
             <a:r>
               <a:rPr lang="en-US" sz="1050" dirty="0">
@@ -9810,7 +9956,7 @@
                 <a:ea typeface="Courier New" pitchFamily="34" charset="-122"/>
                 <a:cs typeface="Courier New" pitchFamily="34" charset="-120"/>
               </a:rPr>
-              <a:t>&amp;4</a:t>
+              <a:t>ZCX_PC_MSG</a:t>
             </a:r>
             <a:r>
               <a:rPr lang="en-US" sz="1050" dirty="0">
@@ -9818,7 +9964,26 @@
                   <a:srgbClr val="556B82"/>
                 </a:solidFill>
               </a:rPr>
-              <a:t>.</a:t>
+              <a:t>; </a:t>
+            </a:r>
+            <a:r>
+              <a:rPr lang="en-US" sz="1050" dirty="0">
+                <a:solidFill>
+                  <a:srgbClr val="0064D9"/>
+                </a:solidFill>
+                <a:latin typeface="Courier New" pitchFamily="34" charset="0"/>
+                <a:ea typeface="Courier New" pitchFamily="34" charset="-122"/>
+                <a:cs typeface="Courier New" pitchFamily="34" charset="-120"/>
+              </a:rPr>
+              <a:t>%element</a:t>
+            </a:r>
+            <a:r>
+              <a:rPr lang="en-US" sz="1050" dirty="0">
+                <a:solidFill>
+                  <a:srgbClr val="556B82"/>
+                </a:solidFill>
+              </a:rPr>
+              <a:t> destaca o campo SKU.</a:t>
             </a:r>
             <a:endParaRPr lang="en-US" sz="1400" dirty="0"/>
           </a:p>
@@ -10073,7 +10238,7 @@
                   <a:srgbClr val="556B82"/>
                 </a:solidFill>
               </a:rPr>
-              <a:t>Confere a consistência ao gravar e recusa dados inválidos com mensagem. Ex.: aeroportos de origem e destino iguais.</a:t>
+              <a:t>Confere a consistência ao gravar e recusa dados inválidos com mensagem. Ex.: SKU duplicado ou quantidade negativa.</a:t>
             </a:r>
             <a:endParaRPr lang="en-US" sz="1400" dirty="0"/>
           </a:p>
@@ -10214,7 +10379,7 @@
                   <a:srgbClr val="556B82"/>
                 </a:solidFill>
               </a:rPr>
-              <a:t>). Ex.: status inicial.</a:t>
+              <a:t>). Ex.: status inicial do pedido.</a:t>
             </a:r>
             <a:endParaRPr lang="en-US" sz="1400" dirty="0"/>
           </a:p>
@@ -10323,7 +10488,7 @@
                   <a:srgbClr val="556B82"/>
                 </a:solidFill>
               </a:rPr>
-              <a:t>Operação de negócio chamada pelo usuário ou por EML. Ex.: aprovar, cancelar, copiar.</a:t>
+              <a:t>Operação de negócio chamada pelo usuário ou por EML. Ex.: aprovar ou cancelar um pedido.</a:t>
             </a:r>
             <a:endParaRPr lang="en-US" sz="1400" dirty="0"/>
           </a:p>
@@ -10427,7 +10592,7 @@
         </p:blipFill>
         <p:spPr>
           <a:xfrm>
-            <a:off x="850392" y="2661412"/>
+            <a:off x="8399069" y="2661412"/>
             <a:ext cx="256032" cy="256032"/>
           </a:xfrm>
           <a:prstGeom prst="rect">
@@ -10451,8 +10616,8 @@
         </p:blipFill>
         <p:spPr>
           <a:xfrm>
-            <a:off x="4624730" y="2661412"/>
-            <a:ext cx="256032" cy="256032"/>
+            <a:off x="749808" y="5019548"/>
+            <a:ext cx="310896" cy="310896"/>
           </a:xfrm>
           <a:prstGeom prst="rect">
             <a:avLst/>
@@ -10475,8 +10640,8 @@
         </p:blipFill>
         <p:spPr>
           <a:xfrm>
-            <a:off x="749808" y="5019548"/>
-            <a:ext cx="310896" cy="310896"/>
+            <a:off x="4624730" y="2661412"/>
+            <a:ext cx="256032" cy="256032"/>
           </a:xfrm>
           <a:prstGeom prst="rect">
             <a:avLst/>
@@ -10499,7 +10664,7 @@
         </p:blipFill>
         <p:spPr>
           <a:xfrm>
-            <a:off x="8399069" y="2661412"/>
+            <a:off x="850392" y="2661412"/>
             <a:ext cx="256032" cy="256032"/>
           </a:xfrm>
           <a:prstGeom prst="rect">
@@ -11287,7 +11452,7 @@
                   <a:srgbClr val="FFFFFF"/>
                 </a:solidFill>
               </a:rPr>
-              <a:t>z_c_connection.bdef</a:t>
+              <a:t>zc_pc_item_app.bdef</a:t>
             </a:r>
             <a:endParaRPr lang="en-US" sz="950" dirty="0"/>
           </a:p>
@@ -11513,6 +11678,46 @@
             </a:r>
             <a:endParaRPr lang="en-US" sz="1050" dirty="0"/>
           </a:p>
+          <a:p>
+            <a:pPr algn="r" indent="0" marL="0">
+              <a:lnSpc>
+                <a:spcPct val="105000"/>
+              </a:lnSpc>
+              <a:buNone/>
+            </a:pPr>
+            <a:r>
+              <a:rPr lang="en-US" sz="1050" dirty="0">
+                <a:solidFill>
+                  <a:srgbClr val="6E7681"/>
+                </a:solidFill>
+                <a:latin typeface="Courier New" pitchFamily="34" charset="0"/>
+                <a:ea typeface="Courier New" pitchFamily="34" charset="-122"/>
+                <a:cs typeface="Courier New" pitchFamily="34" charset="-120"/>
+              </a:rPr>
+              <a:t>11</a:t>
+            </a:r>
+            <a:endParaRPr lang="en-US" sz="1050" dirty="0"/>
+          </a:p>
+          <a:p>
+            <a:pPr algn="r" indent="0" marL="0">
+              <a:lnSpc>
+                <a:spcPct val="105000"/>
+              </a:lnSpc>
+              <a:buNone/>
+            </a:pPr>
+            <a:r>
+              <a:rPr lang="en-US" sz="1050" dirty="0">
+                <a:solidFill>
+                  <a:srgbClr val="6E7681"/>
+                </a:solidFill>
+                <a:latin typeface="Courier New" pitchFamily="34" charset="0"/>
+                <a:ea typeface="Courier New" pitchFamily="34" charset="-122"/>
+                <a:cs typeface="Courier New" pitchFamily="34" charset="-120"/>
+              </a:rPr>
+              <a:t>12</a:t>
+            </a:r>
+            <a:endParaRPr lang="en-US" sz="1050" dirty="0"/>
+          </a:p>
         </p:txBody>
       </p:sp>
       <p:sp>
@@ -11673,13 +11878,46 @@
             <a:r>
               <a:rPr lang="en-US" sz="1050" dirty="0">
                 <a:solidFill>
-                  <a:srgbClr val="000000"/>
+                  <a:srgbClr val="569CD6"/>
+                </a:solidFill>
+                <a:latin typeface="Courier New" pitchFamily="34" charset="0"/>
+                <a:ea typeface="Courier New" pitchFamily="34" charset="-122"/>
+                <a:cs typeface="Courier New" pitchFamily="34" charset="-120"/>
+              </a:rPr>
+              <a:t>use</a:t>
+            </a:r>
+            <a:r>
+              <a:rPr lang="en-US" sz="1050" dirty="0">
+                <a:solidFill>
+                  <a:srgbClr val="CCCCCC"/>
                 </a:solidFill>
                 <a:latin typeface="Courier New" pitchFamily="34" charset="0"/>
                 <a:ea typeface="Courier New" pitchFamily="34" charset="-122"/>
                 <a:cs typeface="Courier New" pitchFamily="34" charset="-120"/>
               </a:rPr>
               <a:t> </a:t>
+            </a:r>
+            <a:r>
+              <a:rPr lang="en-US" sz="1050" dirty="0">
+                <a:solidFill>
+                  <a:srgbClr val="569CD6"/>
+                </a:solidFill>
+                <a:latin typeface="Courier New" pitchFamily="34" charset="0"/>
+                <a:ea typeface="Courier New" pitchFamily="34" charset="-122"/>
+                <a:cs typeface="Courier New" pitchFamily="34" charset="-120"/>
+              </a:rPr>
+              <a:t>draft</a:t>
+            </a:r>
+            <a:r>
+              <a:rPr lang="en-US" sz="1050" dirty="0">
+                <a:solidFill>
+                  <a:srgbClr val="CCCCCC"/>
+                </a:solidFill>
+                <a:latin typeface="Courier New" pitchFamily="34" charset="0"/>
+                <a:ea typeface="Courier New" pitchFamily="34" charset="-122"/>
+                <a:cs typeface="Courier New" pitchFamily="34" charset="-120"/>
+              </a:rPr>
+              <a:t>;</a:t>
             </a:r>
             <a:endParaRPr lang="en-US" sz="1050" dirty="0"/>
           </a:p>
@@ -11693,123 +11931,13 @@
             <a:r>
               <a:rPr lang="en-US" sz="1050" dirty="0">
                 <a:solidFill>
-                  <a:srgbClr val="569CD6"/>
-                </a:solidFill>
-                <a:latin typeface="Courier New" pitchFamily="34" charset="0"/>
-                <a:ea typeface="Courier New" pitchFamily="34" charset="-122"/>
-                <a:cs typeface="Courier New" pitchFamily="34" charset="-120"/>
-              </a:rPr>
-              <a:t>define</a:t>
-            </a:r>
-            <a:r>
-              <a:rPr lang="en-US" sz="1050" dirty="0">
-                <a:solidFill>
-                  <a:srgbClr val="CCCCCC"/>
+                  <a:srgbClr val="000000"/>
                 </a:solidFill>
                 <a:latin typeface="Courier New" pitchFamily="34" charset="0"/>
                 <a:ea typeface="Courier New" pitchFamily="34" charset="-122"/>
                 <a:cs typeface="Courier New" pitchFamily="34" charset="-120"/>
               </a:rPr>
               <a:t> </a:t>
-            </a:r>
-            <a:r>
-              <a:rPr lang="en-US" sz="1050" dirty="0">
-                <a:solidFill>
-                  <a:srgbClr val="569CD6"/>
-                </a:solidFill>
-                <a:latin typeface="Courier New" pitchFamily="34" charset="0"/>
-                <a:ea typeface="Courier New" pitchFamily="34" charset="-122"/>
-                <a:cs typeface="Courier New" pitchFamily="34" charset="-120"/>
-              </a:rPr>
-              <a:t>behavior</a:t>
-            </a:r>
-            <a:r>
-              <a:rPr lang="en-US" sz="1050" dirty="0">
-                <a:solidFill>
-                  <a:srgbClr val="CCCCCC"/>
-                </a:solidFill>
-                <a:latin typeface="Courier New" pitchFamily="34" charset="0"/>
-                <a:ea typeface="Courier New" pitchFamily="34" charset="-122"/>
-                <a:cs typeface="Courier New" pitchFamily="34" charset="-120"/>
-              </a:rPr>
-              <a:t> </a:t>
-            </a:r>
-            <a:r>
-              <a:rPr lang="en-US" sz="1050" dirty="0">
-                <a:solidFill>
-                  <a:srgbClr val="569CD6"/>
-                </a:solidFill>
-                <a:latin typeface="Courier New" pitchFamily="34" charset="0"/>
-                <a:ea typeface="Courier New" pitchFamily="34" charset="-122"/>
-                <a:cs typeface="Courier New" pitchFamily="34" charset="-120"/>
-              </a:rPr>
-              <a:t>for</a:t>
-            </a:r>
-            <a:r>
-              <a:rPr lang="en-US" sz="1050" dirty="0">
-                <a:solidFill>
-                  <a:srgbClr val="CCCCCC"/>
-                </a:solidFill>
-                <a:latin typeface="Courier New" pitchFamily="34" charset="0"/>
-                <a:ea typeface="Courier New" pitchFamily="34" charset="-122"/>
-                <a:cs typeface="Courier New" pitchFamily="34" charset="-120"/>
-              </a:rPr>
-              <a:t> </a:t>
-            </a:r>
-            <a:r>
-              <a:rPr lang="en-US" sz="1050" dirty="0">
-                <a:solidFill>
-                  <a:srgbClr val="CCCCCC"/>
-                </a:solidFill>
-                <a:latin typeface="Courier New" pitchFamily="34" charset="0"/>
-                <a:ea typeface="Courier New" pitchFamily="34" charset="-122"/>
-                <a:cs typeface="Courier New" pitchFamily="34" charset="-120"/>
-              </a:rPr>
-              <a:t>Z_C_CONNECTION</a:t>
-            </a:r>
-            <a:r>
-              <a:rPr lang="en-US" sz="1050" dirty="0">
-                <a:solidFill>
-                  <a:srgbClr val="CCCCCC"/>
-                </a:solidFill>
-                <a:latin typeface="Courier New" pitchFamily="34" charset="0"/>
-                <a:ea typeface="Courier New" pitchFamily="34" charset="-122"/>
-                <a:cs typeface="Courier New" pitchFamily="34" charset="-120"/>
-              </a:rPr>
-              <a:t> </a:t>
-            </a:r>
-            <a:r>
-              <a:rPr lang="en-US" sz="1050" dirty="0">
-                <a:solidFill>
-                  <a:srgbClr val="569CD6"/>
-                </a:solidFill>
-                <a:latin typeface="Courier New" pitchFamily="34" charset="0"/>
-                <a:ea typeface="Courier New" pitchFamily="34" charset="-122"/>
-                <a:cs typeface="Courier New" pitchFamily="34" charset="-120"/>
-              </a:rPr>
-              <a:t>alias</a:t>
-            </a:r>
-            <a:r>
-              <a:rPr lang="en-US" sz="1050" dirty="0">
-                <a:solidFill>
-                  <a:srgbClr val="CCCCCC"/>
-                </a:solidFill>
-                <a:latin typeface="Courier New" pitchFamily="34" charset="0"/>
-                <a:ea typeface="Courier New" pitchFamily="34" charset="-122"/>
-                <a:cs typeface="Courier New" pitchFamily="34" charset="-120"/>
-              </a:rPr>
-              <a:t> </a:t>
-            </a:r>
-            <a:r>
-              <a:rPr lang="en-US" sz="1050" dirty="0">
-                <a:solidFill>
-                  <a:srgbClr val="CCCCCC"/>
-                </a:solidFill>
-                <a:latin typeface="Courier New" pitchFamily="34" charset="0"/>
-                <a:ea typeface="Courier New" pitchFamily="34" charset="-122"/>
-                <a:cs typeface="Courier New" pitchFamily="34" charset="-120"/>
-              </a:rPr>
-              <a:t>Connection</a:t>
             </a:r>
             <a:endParaRPr lang="en-US" sz="1050" dirty="0"/>
           </a:p>
@@ -11823,13 +11951,123 @@
             <a:r>
               <a:rPr lang="en-US" sz="1050" dirty="0">
                 <a:solidFill>
-                  <a:srgbClr val="CCCCCC"/>
-                </a:solidFill>
-                <a:latin typeface="Courier New" pitchFamily="34" charset="0"/>
-                <a:ea typeface="Courier New" pitchFamily="34" charset="-122"/>
-                <a:cs typeface="Courier New" pitchFamily="34" charset="-120"/>
-              </a:rPr>
-              <a:t>{</a:t>
+                  <a:srgbClr val="569CD6"/>
+                </a:solidFill>
+                <a:latin typeface="Courier New" pitchFamily="34" charset="0"/>
+                <a:ea typeface="Courier New" pitchFamily="34" charset="-122"/>
+                <a:cs typeface="Courier New" pitchFamily="34" charset="-120"/>
+              </a:rPr>
+              <a:t>define</a:t>
+            </a:r>
+            <a:r>
+              <a:rPr lang="en-US" sz="1050" dirty="0">
+                <a:solidFill>
+                  <a:srgbClr val="CCCCCC"/>
+                </a:solidFill>
+                <a:latin typeface="Courier New" pitchFamily="34" charset="0"/>
+                <a:ea typeface="Courier New" pitchFamily="34" charset="-122"/>
+                <a:cs typeface="Courier New" pitchFamily="34" charset="-120"/>
+              </a:rPr>
+              <a:t> </a:t>
+            </a:r>
+            <a:r>
+              <a:rPr lang="en-US" sz="1050" dirty="0">
+                <a:solidFill>
+                  <a:srgbClr val="569CD6"/>
+                </a:solidFill>
+                <a:latin typeface="Courier New" pitchFamily="34" charset="0"/>
+                <a:ea typeface="Courier New" pitchFamily="34" charset="-122"/>
+                <a:cs typeface="Courier New" pitchFamily="34" charset="-120"/>
+              </a:rPr>
+              <a:t>behavior</a:t>
+            </a:r>
+            <a:r>
+              <a:rPr lang="en-US" sz="1050" dirty="0">
+                <a:solidFill>
+                  <a:srgbClr val="CCCCCC"/>
+                </a:solidFill>
+                <a:latin typeface="Courier New" pitchFamily="34" charset="0"/>
+                <a:ea typeface="Courier New" pitchFamily="34" charset="-122"/>
+                <a:cs typeface="Courier New" pitchFamily="34" charset="-120"/>
+              </a:rPr>
+              <a:t> </a:t>
+            </a:r>
+            <a:r>
+              <a:rPr lang="en-US" sz="1050" dirty="0">
+                <a:solidFill>
+                  <a:srgbClr val="569CD6"/>
+                </a:solidFill>
+                <a:latin typeface="Courier New" pitchFamily="34" charset="0"/>
+                <a:ea typeface="Courier New" pitchFamily="34" charset="-122"/>
+                <a:cs typeface="Courier New" pitchFamily="34" charset="-120"/>
+              </a:rPr>
+              <a:t>for</a:t>
+            </a:r>
+            <a:r>
+              <a:rPr lang="en-US" sz="1050" dirty="0">
+                <a:solidFill>
+                  <a:srgbClr val="CCCCCC"/>
+                </a:solidFill>
+                <a:latin typeface="Courier New" pitchFamily="34" charset="0"/>
+                <a:ea typeface="Courier New" pitchFamily="34" charset="-122"/>
+                <a:cs typeface="Courier New" pitchFamily="34" charset="-120"/>
+              </a:rPr>
+              <a:t> </a:t>
+            </a:r>
+            <a:r>
+              <a:rPr lang="en-US" sz="1050" dirty="0">
+                <a:solidFill>
+                  <a:srgbClr val="CCCCCC"/>
+                </a:solidFill>
+                <a:latin typeface="Courier New" pitchFamily="34" charset="0"/>
+                <a:ea typeface="Courier New" pitchFamily="34" charset="-122"/>
+                <a:cs typeface="Courier New" pitchFamily="34" charset="-120"/>
+              </a:rPr>
+              <a:t>ZC_PC_ITEM_APP</a:t>
+            </a:r>
+            <a:r>
+              <a:rPr lang="en-US" sz="1050" dirty="0">
+                <a:solidFill>
+                  <a:srgbClr val="CCCCCC"/>
+                </a:solidFill>
+                <a:latin typeface="Courier New" pitchFamily="34" charset="0"/>
+                <a:ea typeface="Courier New" pitchFamily="34" charset="-122"/>
+                <a:cs typeface="Courier New" pitchFamily="34" charset="-120"/>
+              </a:rPr>
+              <a:t> </a:t>
+            </a:r>
+            <a:r>
+              <a:rPr lang="en-US" sz="1050" dirty="0">
+                <a:solidFill>
+                  <a:srgbClr val="569CD6"/>
+                </a:solidFill>
+                <a:latin typeface="Courier New" pitchFamily="34" charset="0"/>
+                <a:ea typeface="Courier New" pitchFamily="34" charset="-122"/>
+                <a:cs typeface="Courier New" pitchFamily="34" charset="-120"/>
+              </a:rPr>
+              <a:t>alias</a:t>
+            </a:r>
+            <a:r>
+              <a:rPr lang="en-US" sz="1050" dirty="0">
+                <a:solidFill>
+                  <a:srgbClr val="CCCCCC"/>
+                </a:solidFill>
+                <a:latin typeface="Courier New" pitchFamily="34" charset="0"/>
+                <a:ea typeface="Courier New" pitchFamily="34" charset="-122"/>
+                <a:cs typeface="Courier New" pitchFamily="34" charset="-120"/>
+              </a:rPr>
+              <a:t> </a:t>
+            </a:r>
+            <a:r>
+              <a:rPr lang="en-US" sz="1050" dirty="0">
+                <a:solidFill>
+                  <a:srgbClr val="CCCCCC"/>
+                </a:solidFill>
+                <a:latin typeface="Courier New" pitchFamily="34" charset="0"/>
+                <a:ea typeface="Courier New" pitchFamily="34" charset="-122"/>
+                <a:cs typeface="Courier New" pitchFamily="34" charset="-120"/>
+              </a:rPr>
+              <a:t>Item</a:t>
             </a:r>
             <a:endParaRPr lang="en-US" sz="1050" dirty="0"/>
           </a:p>
@@ -11843,24 +12081,13 @@
             <a:r>
               <a:rPr lang="en-US" sz="1050" dirty="0">
                 <a:solidFill>
-                  <a:srgbClr val="CCCCCC"/>
-                </a:solidFill>
-                <a:latin typeface="Courier New" pitchFamily="34" charset="0"/>
-                <a:ea typeface="Courier New" pitchFamily="34" charset="-122"/>
-                <a:cs typeface="Courier New" pitchFamily="34" charset="-120"/>
-              </a:rPr>
-              <a:t>  </a:t>
-            </a:r>
-            <a:r>
-              <a:rPr lang="en-US" sz="1050" dirty="0">
-                <a:solidFill>
                   <a:srgbClr val="569CD6"/>
                 </a:solidFill>
                 <a:latin typeface="Courier New" pitchFamily="34" charset="0"/>
                 <a:ea typeface="Courier New" pitchFamily="34" charset="-122"/>
                 <a:cs typeface="Courier New" pitchFamily="34" charset="-120"/>
               </a:rPr>
-              <a:t>field</a:t>
+              <a:t>use</a:t>
             </a:r>
             <a:r>
               <a:rPr lang="en-US" sz="1050" dirty="0">
@@ -11876,90 +12103,13 @@
             <a:r>
               <a:rPr lang="en-US" sz="1050" dirty="0">
                 <a:solidFill>
-                  <a:srgbClr val="CCCCCC"/>
-                </a:solidFill>
-                <a:latin typeface="Courier New" pitchFamily="34" charset="0"/>
-                <a:ea typeface="Courier New" pitchFamily="34" charset="-122"/>
-                <a:cs typeface="Courier New" pitchFamily="34" charset="-120"/>
-              </a:rPr>
-              <a:t>(</a:t>
-            </a:r>
-            <a:r>
-              <a:rPr lang="en-US" sz="1050" dirty="0">
-                <a:solidFill>
-                  <a:srgbClr val="CCCCCC"/>
-                </a:solidFill>
-                <a:latin typeface="Courier New" pitchFamily="34" charset="0"/>
-                <a:ea typeface="Courier New" pitchFamily="34" charset="-122"/>
-                <a:cs typeface="Courier New" pitchFamily="34" charset="-120"/>
-              </a:rPr>
-              <a:t> </a:t>
-            </a:r>
-            <a:r>
-              <a:rPr lang="en-US" sz="1050" dirty="0">
-                <a:solidFill>
                   <a:srgbClr val="569CD6"/>
                 </a:solidFill>
                 <a:latin typeface="Courier New" pitchFamily="34" charset="0"/>
                 <a:ea typeface="Courier New" pitchFamily="34" charset="-122"/>
                 <a:cs typeface="Courier New" pitchFamily="34" charset="-120"/>
               </a:rPr>
-              <a:t>readonly</a:t>
-            </a:r>
-            <a:r>
-              <a:rPr lang="en-US" sz="1050" dirty="0">
-                <a:solidFill>
-                  <a:srgbClr val="CCCCCC"/>
-                </a:solidFill>
-                <a:latin typeface="Courier New" pitchFamily="34" charset="0"/>
-                <a:ea typeface="Courier New" pitchFamily="34" charset="-122"/>
-                <a:cs typeface="Courier New" pitchFamily="34" charset="-120"/>
-              </a:rPr>
-              <a:t> </a:t>
-            </a:r>
-            <a:r>
-              <a:rPr lang="en-US" sz="1050" dirty="0">
-                <a:solidFill>
-                  <a:srgbClr val="CCCCCC"/>
-                </a:solidFill>
-                <a:latin typeface="Courier New" pitchFamily="34" charset="0"/>
-                <a:ea typeface="Courier New" pitchFamily="34" charset="-122"/>
-                <a:cs typeface="Courier New" pitchFamily="34" charset="-120"/>
-              </a:rPr>
-              <a:t>)</a:t>
-            </a:r>
-            <a:r>
-              <a:rPr lang="en-US" sz="1050" dirty="0">
-                <a:solidFill>
-                  <a:srgbClr val="CCCCCC"/>
-                </a:solidFill>
-                <a:latin typeface="Courier New" pitchFamily="34" charset="0"/>
-                <a:ea typeface="Courier New" pitchFamily="34" charset="-122"/>
-                <a:cs typeface="Courier New" pitchFamily="34" charset="-120"/>
-              </a:rPr>
-              <a:t> </a:t>
-            </a:r>
-            <a:r>
-              <a:rPr lang="en-US" sz="1050" dirty="0">
-                <a:solidFill>
-                  <a:srgbClr val="CCCCCC"/>
-                </a:solidFill>
-                <a:latin typeface="Courier New" pitchFamily="34" charset="0"/>
-                <a:ea typeface="Courier New" pitchFamily="34" charset="-122"/>
-                <a:cs typeface="Courier New" pitchFamily="34" charset="-120"/>
-              </a:rPr>
-              <a:t>AirportFromID</a:t>
-            </a:r>
-            <a:r>
-              <a:rPr lang="en-US" sz="1050" dirty="0">
-                <a:solidFill>
-                  <a:srgbClr val="CCCCCC"/>
-                </a:solidFill>
-                <a:latin typeface="Courier New" pitchFamily="34" charset="0"/>
-                <a:ea typeface="Courier New" pitchFamily="34" charset="-122"/>
-                <a:cs typeface="Courier New" pitchFamily="34" charset="-120"/>
-              </a:rPr>
-              <a:t>;</a:t>
+              <a:t>etag</a:t>
             </a:r>
             <a:endParaRPr lang="en-US" sz="1050" dirty="0"/>
           </a:p>
@@ -11971,15 +12121,15 @@
               <a:buNone/>
             </a:pPr>
             <a:r>
-              <a:rPr lang="en-US" sz="1050" i="1" dirty="0">
-                <a:solidFill>
-                  <a:srgbClr val="6A9955"/>
-                </a:solidFill>
-                <a:latin typeface="Courier New" pitchFamily="34" charset="0"/>
-                <a:ea typeface="Courier New" pitchFamily="34" charset="-122"/>
-                <a:cs typeface="Courier New" pitchFamily="34" charset="-120"/>
-              </a:rPr>
-              <a:t>//  use create;</a:t>
+              <a:rPr lang="en-US" sz="1050" dirty="0">
+                <a:solidFill>
+                  <a:srgbClr val="CCCCCC"/>
+                </a:solidFill>
+                <a:latin typeface="Courier New" pitchFamily="34" charset="0"/>
+                <a:ea typeface="Courier New" pitchFamily="34" charset="-122"/>
+                <a:cs typeface="Courier New" pitchFamily="34" charset="-120"/>
+              </a:rPr>
+              <a:t>{</a:t>
             </a:r>
             <a:endParaRPr lang="en-US" sz="1050" dirty="0"/>
           </a:p>
@@ -12032,7 +12182,7 @@
                 <a:ea typeface="Courier New" pitchFamily="34" charset="-122"/>
                 <a:cs typeface="Courier New" pitchFamily="34" charset="-120"/>
               </a:rPr>
-              <a:t>update</a:t>
+              <a:t>create</a:t>
             </a:r>
             <a:r>
               <a:rPr lang="en-US" sz="1050" dirty="0">
@@ -12055,15 +12205,59 @@
               <a:buNone/>
             </a:pPr>
             <a:r>
-              <a:rPr lang="en-US" sz="1050" i="1" dirty="0">
-                <a:solidFill>
-                  <a:srgbClr val="6A9955"/>
-                </a:solidFill>
-                <a:latin typeface="Courier New" pitchFamily="34" charset="0"/>
-                <a:ea typeface="Courier New" pitchFamily="34" charset="-122"/>
-                <a:cs typeface="Courier New" pitchFamily="34" charset="-120"/>
-              </a:rPr>
-              <a:t>//  use delete;</a:t>
+              <a:rPr lang="en-US" sz="1050" dirty="0">
+                <a:solidFill>
+                  <a:srgbClr val="CCCCCC"/>
+                </a:solidFill>
+                <a:latin typeface="Courier New" pitchFamily="34" charset="0"/>
+                <a:ea typeface="Courier New" pitchFamily="34" charset="-122"/>
+                <a:cs typeface="Courier New" pitchFamily="34" charset="-120"/>
+              </a:rPr>
+              <a:t>  </a:t>
+            </a:r>
+            <a:r>
+              <a:rPr lang="en-US" sz="1050" dirty="0">
+                <a:solidFill>
+                  <a:srgbClr val="569CD6"/>
+                </a:solidFill>
+                <a:latin typeface="Courier New" pitchFamily="34" charset="0"/>
+                <a:ea typeface="Courier New" pitchFamily="34" charset="-122"/>
+                <a:cs typeface="Courier New" pitchFamily="34" charset="-120"/>
+              </a:rPr>
+              <a:t>use</a:t>
+            </a:r>
+            <a:r>
+              <a:rPr lang="en-US" sz="1050" dirty="0">
+                <a:solidFill>
+                  <a:srgbClr val="CCCCCC"/>
+                </a:solidFill>
+                <a:latin typeface="Courier New" pitchFamily="34" charset="0"/>
+                <a:ea typeface="Courier New" pitchFamily="34" charset="-122"/>
+                <a:cs typeface="Courier New" pitchFamily="34" charset="-120"/>
+              </a:rPr>
+              <a:t> </a:t>
+            </a:r>
+            <a:r>
+              <a:rPr lang="en-US" sz="1050" dirty="0">
+                <a:solidFill>
+                  <a:srgbClr val="569CD6"/>
+                </a:solidFill>
+                <a:latin typeface="Courier New" pitchFamily="34" charset="0"/>
+                <a:ea typeface="Courier New" pitchFamily="34" charset="-122"/>
+                <a:cs typeface="Courier New" pitchFamily="34" charset="-120"/>
+              </a:rPr>
+              <a:t>update</a:t>
+            </a:r>
+            <a:r>
+              <a:rPr lang="en-US" sz="1050" dirty="0">
+                <a:solidFill>
+                  <a:srgbClr val="CCCCCC"/>
+                </a:solidFill>
+                <a:latin typeface="Courier New" pitchFamily="34" charset="0"/>
+                <a:ea typeface="Courier New" pitchFamily="34" charset="-122"/>
+                <a:cs typeface="Courier New" pitchFamily="34" charset="-120"/>
+              </a:rPr>
+              <a:t>;</a:t>
             </a:r>
             <a:endParaRPr lang="en-US" sz="1050" dirty="0"/>
           </a:p>
@@ -12075,6 +12269,112 @@
               <a:buNone/>
             </a:pPr>
             <a:r>
+              <a:rPr lang="en-US" sz="1050" i="1" dirty="0">
+                <a:solidFill>
+                  <a:srgbClr val="6A9955"/>
+                </a:solidFill>
+                <a:latin typeface="Courier New" pitchFamily="34" charset="0"/>
+                <a:ea typeface="Courier New" pitchFamily="34" charset="-122"/>
+                <a:cs typeface="Courier New" pitchFamily="34" charset="-120"/>
+              </a:rPr>
+              <a:t>//  use delete;</a:t>
+            </a:r>
+            <a:endParaRPr lang="en-US" sz="1050" dirty="0"/>
+          </a:p>
+          <a:p>
+            <a:pPr indent="0" marL="0">
+              <a:lnSpc>
+                <a:spcPct val="105000"/>
+              </a:lnSpc>
+              <a:buNone/>
+            </a:pPr>
+            <a:r>
+              <a:rPr lang="en-US" sz="1050" dirty="0">
+                <a:solidFill>
+                  <a:srgbClr val="CCCCCC"/>
+                </a:solidFill>
+                <a:latin typeface="Courier New" pitchFamily="34" charset="0"/>
+                <a:ea typeface="Courier New" pitchFamily="34" charset="-122"/>
+                <a:cs typeface="Courier New" pitchFamily="34" charset="-120"/>
+              </a:rPr>
+              <a:t>  </a:t>
+            </a:r>
+            <a:r>
+              <a:rPr lang="en-US" sz="1050" dirty="0">
+                <a:solidFill>
+                  <a:srgbClr val="569CD6"/>
+                </a:solidFill>
+                <a:latin typeface="Courier New" pitchFamily="34" charset="0"/>
+                <a:ea typeface="Courier New" pitchFamily="34" charset="-122"/>
+                <a:cs typeface="Courier New" pitchFamily="34" charset="-120"/>
+              </a:rPr>
+              <a:t>use</a:t>
+            </a:r>
+            <a:r>
+              <a:rPr lang="en-US" sz="1050" dirty="0">
+                <a:solidFill>
+                  <a:srgbClr val="CCCCCC"/>
+                </a:solidFill>
+                <a:latin typeface="Courier New" pitchFamily="34" charset="0"/>
+                <a:ea typeface="Courier New" pitchFamily="34" charset="-122"/>
+                <a:cs typeface="Courier New" pitchFamily="34" charset="-120"/>
+              </a:rPr>
+              <a:t> </a:t>
+            </a:r>
+            <a:r>
+              <a:rPr lang="en-US" sz="1050" dirty="0">
+                <a:solidFill>
+                  <a:srgbClr val="569CD6"/>
+                </a:solidFill>
+                <a:latin typeface="Courier New" pitchFamily="34" charset="0"/>
+                <a:ea typeface="Courier New" pitchFamily="34" charset="-122"/>
+                <a:cs typeface="Courier New" pitchFamily="34" charset="-120"/>
+              </a:rPr>
+              <a:t>action</a:t>
+            </a:r>
+            <a:r>
+              <a:rPr lang="en-US" sz="1050" dirty="0">
+                <a:solidFill>
+                  <a:srgbClr val="CCCCCC"/>
+                </a:solidFill>
+                <a:latin typeface="Courier New" pitchFamily="34" charset="0"/>
+                <a:ea typeface="Courier New" pitchFamily="34" charset="-122"/>
+                <a:cs typeface="Courier New" pitchFamily="34" charset="-120"/>
+              </a:rPr>
+              <a:t> </a:t>
+            </a:r>
+            <a:r>
+              <a:rPr lang="en-US" sz="1050" dirty="0">
+                <a:solidFill>
+                  <a:srgbClr val="CCCCCC"/>
+                </a:solidFill>
+                <a:latin typeface="Courier New" pitchFamily="34" charset="0"/>
+                <a:ea typeface="Courier New" pitchFamily="34" charset="-122"/>
+                <a:cs typeface="Courier New" pitchFamily="34" charset="-120"/>
+              </a:rPr>
+              <a:t>Edit</a:t>
+            </a:r>
+            <a:r>
+              <a:rPr lang="en-US" sz="1050" dirty="0">
+                <a:solidFill>
+                  <a:srgbClr val="CCCCCC"/>
+                </a:solidFill>
+                <a:latin typeface="Courier New" pitchFamily="34" charset="0"/>
+                <a:ea typeface="Courier New" pitchFamily="34" charset="-122"/>
+                <a:cs typeface="Courier New" pitchFamily="34" charset="-120"/>
+              </a:rPr>
+              <a:t>;</a:t>
+            </a:r>
+            <a:endParaRPr lang="en-US" sz="1050" dirty="0"/>
+          </a:p>
+          <a:p>
+            <a:pPr indent="0" marL="0">
+              <a:lnSpc>
+                <a:spcPct val="105000"/>
+              </a:lnSpc>
+              <a:buNone/>
+            </a:pPr>
+            <a:r>
               <a:rPr lang="en-US" sz="1050" dirty="0">
                 <a:solidFill>
                   <a:srgbClr val="CCCCCC"/>
@@ -12130,7 +12430,7 @@
                 <a:ea typeface="Courier New" pitchFamily="34" charset="-122"/>
                 <a:cs typeface="Courier New" pitchFamily="34" charset="-120"/>
               </a:rPr>
-              <a:t>use create</a:t>
+              <a:t>use delete</a:t>
             </a:r>
             <a:r>
               <a:rPr lang="en-US" sz="1200" dirty="0">
@@ -12138,18 +12438,34 @@
                   <a:srgbClr val="556B82"/>
                 </a:solidFill>
               </a:rPr>
-              <a:t> e </a:t>
+              <a:t> tira o botão </a:t>
+            </a:r>
+            <a:r>
+              <a:rPr lang="en-US" sz="1200" b="1" dirty="0">
+                <a:solidFill>
+                  <a:srgbClr val="556B82"/>
+                </a:solidFill>
+              </a:rPr>
+              <a:t>Excluir</a:t>
             </a:r>
             <a:r>
               <a:rPr lang="en-US" sz="1200" dirty="0">
                 <a:solidFill>
+                  <a:srgbClr val="556B82"/>
+                </a:solidFill>
+              </a:rPr>
+              <a:t> só deste app; o business object </a:t>
+            </a:r>
+            <a:r>
+              <a:rPr lang="en-US" sz="1200" dirty="0">
+                <a:solidFill>
                   <a:srgbClr val="0064D9"/>
                 </a:solidFill>
                 <a:latin typeface="Courier New" pitchFamily="34" charset="0"/>
                 <a:ea typeface="Courier New" pitchFamily="34" charset="-122"/>
                 <a:cs typeface="Courier New" pitchFamily="34" charset="-120"/>
               </a:rPr>
-              <a:t>use delete</a:t>
+              <a:t>ZR_PC_ITEM</a:t>
             </a:r>
             <a:r>
               <a:rPr lang="en-US" sz="1200" dirty="0">
@@ -12157,39 +12473,7 @@
                   <a:srgbClr val="556B82"/>
                 </a:solidFill>
               </a:rPr>
-              <a:t> tira os botões </a:t>
-            </a:r>
-            <a:r>
-              <a:rPr lang="en-US" sz="1200" b="1" dirty="0">
-                <a:solidFill>
-                  <a:srgbClr val="556B82"/>
-                </a:solidFill>
-              </a:rPr>
-              <a:t>Criar</a:t>
-            </a:r>
-            <a:r>
-              <a:rPr lang="en-US" sz="1200" dirty="0">
-                <a:solidFill>
-                  <a:srgbClr val="556B82"/>
-                </a:solidFill>
-              </a:rPr>
-              <a:t> e </a:t>
-            </a:r>
-            <a:r>
-              <a:rPr lang="en-US" sz="1200" b="1" dirty="0">
-                <a:solidFill>
-                  <a:srgbClr val="556B82"/>
-                </a:solidFill>
-              </a:rPr>
-              <a:t>Excluir</a:t>
-            </a:r>
-            <a:r>
-              <a:rPr lang="en-US" sz="1200" dirty="0">
-                <a:solidFill>
-                  <a:srgbClr val="556B82"/>
-                </a:solidFill>
-              </a:rPr>
-              <a:t> só deste app; o business object continua permitindo.</a:t>
+              <a:t> continua permitindo.</a:t>
             </a:r>
             <a:endParaRPr lang="en-US" sz="1400" dirty="0"/>
           </a:p>
@@ -12372,7 +12656,7 @@
                   <a:srgbClr val="FFFFFF"/>
                 </a:solidFill>
               </a:rPr>
-              <a:t>z_c_connection.ddlx</a:t>
+              <a:t>zc_pc_item_app.ddlx</a:t>
             </a:r>
             <a:endParaRPr lang="en-US" sz="950" dirty="0"/>
           </a:p>
@@ -12689,7 +12973,7 @@
                 <a:ea typeface="Courier New" pitchFamily="34" charset="-122"/>
                 <a:cs typeface="Courier New" pitchFamily="34" charset="-120"/>
               </a:rPr>
-              <a:t>#CUSTOMER</a:t>
+              <a:t>#CORE</a:t>
             </a:r>
             <a:endParaRPr lang="en-US" sz="1050" dirty="0"/>
           </a:p>
@@ -12753,7 +13037,7 @@
                 <a:ea typeface="Courier New" pitchFamily="34" charset="-122"/>
                 <a:cs typeface="Courier New" pitchFamily="34" charset="-120"/>
               </a:rPr>
-              <a:t>Z_C_CONNECTION</a:t>
+              <a:t>ZC_PC_ITEM_APP</a:t>
             </a:r>
             <a:r>
               <a:rPr lang="en-US" sz="1050" dirty="0">
@@ -12826,7 +13110,7 @@
                 <a:ea typeface="Courier New" pitchFamily="34" charset="-122"/>
                 <a:cs typeface="Courier New" pitchFamily="34" charset="-120"/>
               </a:rPr>
-              <a:t>@UI.lineItem</a:t>
+              <a:t>@UI</a:t>
             </a:r>
             <a:r>
               <a:rPr lang="en-US" sz="1050" dirty="0">
@@ -12848,6 +13132,61 @@
                 <a:ea typeface="Courier New" pitchFamily="34" charset="-122"/>
                 <a:cs typeface="Courier New" pitchFamily="34" charset="-120"/>
               </a:rPr>
+              <a:t> </a:t>
+            </a:r>
+            <a:r>
+              <a:rPr lang="en-US" sz="1050" dirty="0">
+                <a:solidFill>
+                  <a:srgbClr val="CCCCCC"/>
+                </a:solidFill>
+                <a:latin typeface="Courier New" pitchFamily="34" charset="0"/>
+                <a:ea typeface="Courier New" pitchFamily="34" charset="-122"/>
+                <a:cs typeface="Courier New" pitchFamily="34" charset="-120"/>
+              </a:rPr>
+              <a:t>{</a:t>
+            </a:r>
+            <a:r>
+              <a:rPr lang="en-US" sz="1050" dirty="0">
+                <a:solidFill>
+                  <a:srgbClr val="CCCCCC"/>
+                </a:solidFill>
+                <a:latin typeface="Courier New" pitchFamily="34" charset="0"/>
+                <a:ea typeface="Courier New" pitchFamily="34" charset="-122"/>
+                <a:cs typeface="Courier New" pitchFamily="34" charset="-120"/>
+              </a:rPr>
+              <a:t> </a:t>
+            </a:r>
+            <a:r>
+              <a:rPr lang="en-US" sz="1050" dirty="0">
+                <a:solidFill>
+                  <a:srgbClr val="CCCCCC"/>
+                </a:solidFill>
+                <a:latin typeface="Courier New" pitchFamily="34" charset="0"/>
+                <a:ea typeface="Courier New" pitchFamily="34" charset="-122"/>
+                <a:cs typeface="Courier New" pitchFamily="34" charset="-120"/>
+              </a:rPr>
+              <a:t>lineItem</a:t>
+            </a:r>
+            <a:r>
+              <a:rPr lang="en-US" sz="1050" dirty="0">
+                <a:solidFill>
+                  <a:srgbClr val="CCCCCC"/>
+                </a:solidFill>
+                <a:latin typeface="Courier New" pitchFamily="34" charset="0"/>
+                <a:ea typeface="Courier New" pitchFamily="34" charset="-122"/>
+                <a:cs typeface="Courier New" pitchFamily="34" charset="-120"/>
+              </a:rPr>
+              <a:t>:</a:t>
+            </a:r>
+            <a:r>
+              <a:rPr lang="en-US" sz="1050" dirty="0">
+                <a:solidFill>
+                  <a:srgbClr val="CCCCCC"/>
+                </a:solidFill>
+                <a:latin typeface="Courier New" pitchFamily="34" charset="0"/>
+                <a:ea typeface="Courier New" pitchFamily="34" charset="-122"/>
+                <a:cs typeface="Courier New" pitchFamily="34" charset="-120"/>
+              </a:rPr>
               <a:t>       </a:t>
             </a:r>
             <a:r>
@@ -12870,6 +13209,17 @@
                 <a:ea typeface="Courier New" pitchFamily="34" charset="-122"/>
                 <a:cs typeface="Courier New" pitchFamily="34" charset="-120"/>
               </a:rPr>
+              <a:t>{</a:t>
+            </a:r>
+            <a:r>
+              <a:rPr lang="en-US" sz="1050" dirty="0">
+                <a:solidFill>
+                  <a:srgbClr val="CCCCCC"/>
+                </a:solidFill>
+                <a:latin typeface="Courier New" pitchFamily="34" charset="0"/>
+                <a:ea typeface="Courier New" pitchFamily="34" charset="-122"/>
+                <a:cs typeface="Courier New" pitchFamily="34" charset="-120"/>
+              </a:rPr>
               <a:t> </a:t>
             </a:r>
             <a:r>
@@ -12881,7 +13231,18 @@
                 <a:ea typeface="Courier New" pitchFamily="34" charset="-122"/>
                 <a:cs typeface="Courier New" pitchFamily="34" charset="-120"/>
               </a:rPr>
-              <a:t>{</a:t>
+              <a:t>position</a:t>
+            </a:r>
+            <a:r>
+              <a:rPr lang="en-US" sz="1050" dirty="0">
+                <a:solidFill>
+                  <a:srgbClr val="CCCCCC"/>
+                </a:solidFill>
+                <a:latin typeface="Courier New" pitchFamily="34" charset="0"/>
+                <a:ea typeface="Courier New" pitchFamily="34" charset="-122"/>
+                <a:cs typeface="Courier New" pitchFamily="34" charset="-120"/>
+              </a:rPr>
+              <a:t>:</a:t>
             </a:r>
             <a:r>
               <a:rPr lang="en-US" sz="1050" dirty="0">
@@ -12897,13 +13258,46 @@
             <a:r>
               <a:rPr lang="en-US" sz="1050" dirty="0">
                 <a:solidFill>
-                  <a:srgbClr val="CCCCCC"/>
-                </a:solidFill>
-                <a:latin typeface="Courier New" pitchFamily="34" charset="0"/>
-                <a:ea typeface="Courier New" pitchFamily="34" charset="-122"/>
-                <a:cs typeface="Courier New" pitchFamily="34" charset="-120"/>
-              </a:rPr>
-              <a:t>position</a:t>
+                  <a:srgbClr val="B5CEA8"/>
+                </a:solidFill>
+                <a:latin typeface="Courier New" pitchFamily="34" charset="0"/>
+                <a:ea typeface="Courier New" pitchFamily="34" charset="-122"/>
+                <a:cs typeface="Courier New" pitchFamily="34" charset="-120"/>
+              </a:rPr>
+              <a:t>10</a:t>
+            </a:r>
+            <a:r>
+              <a:rPr lang="en-US" sz="1050" dirty="0">
+                <a:solidFill>
+                  <a:srgbClr val="CCCCCC"/>
+                </a:solidFill>
+                <a:latin typeface="Courier New" pitchFamily="34" charset="0"/>
+                <a:ea typeface="Courier New" pitchFamily="34" charset="-122"/>
+                <a:cs typeface="Courier New" pitchFamily="34" charset="-120"/>
+              </a:rPr>
+              <a:t>,</a:t>
+            </a:r>
+            <a:r>
+              <a:rPr lang="en-US" sz="1050" dirty="0">
+                <a:solidFill>
+                  <a:srgbClr val="CCCCCC"/>
+                </a:solidFill>
+                <a:latin typeface="Courier New" pitchFamily="34" charset="0"/>
+                <a:ea typeface="Courier New" pitchFamily="34" charset="-122"/>
+                <a:cs typeface="Courier New" pitchFamily="34" charset="-120"/>
+              </a:rPr>
+              <a:t> </a:t>
+            </a:r>
+            <a:r>
+              <a:rPr lang="en-US" sz="1050" dirty="0">
+                <a:solidFill>
+                  <a:srgbClr val="CCCCCC"/>
+                </a:solidFill>
+                <a:latin typeface="Courier New" pitchFamily="34" charset="0"/>
+                <a:ea typeface="Courier New" pitchFamily="34" charset="-122"/>
+                <a:cs typeface="Courier New" pitchFamily="34" charset="-120"/>
+              </a:rPr>
+              <a:t>label</a:t>
             </a:r>
             <a:r>
               <a:rPr lang="en-US" sz="1050" dirty="0">
@@ -12930,13 +13324,13 @@
             <a:r>
               <a:rPr lang="en-US" sz="1050" dirty="0">
                 <a:solidFill>
-                  <a:srgbClr val="B5CEA8"/>
-                </a:solidFill>
-                <a:latin typeface="Courier New" pitchFamily="34" charset="0"/>
-                <a:ea typeface="Courier New" pitchFamily="34" charset="-122"/>
-                <a:cs typeface="Courier New" pitchFamily="34" charset="-120"/>
-              </a:rPr>
-              <a:t>10</a:t>
+                  <a:srgbClr val="CE9178"/>
+                </a:solidFill>
+                <a:latin typeface="Courier New" pitchFamily="34" charset="0"/>
+                <a:ea typeface="Courier New" pitchFamily="34" charset="-122"/>
+                <a:cs typeface="Courier New" pitchFamily="34" charset="-120"/>
+              </a:rPr>
+              <a:t>'SKU'</a:t>
             </a:r>
             <a:r>
               <a:rPr lang="en-US" sz="1050" dirty="0">
@@ -12969,18 +13363,18 @@
                 <a:ea typeface="Courier New" pitchFamily="34" charset="-122"/>
                 <a:cs typeface="Courier New" pitchFamily="34" charset="-120"/>
               </a:rPr>
-              <a:t> </a:t>
-            </a:r>
-            <a:r>
-              <a:rPr lang="en-US" sz="1050" dirty="0">
-                <a:solidFill>
-                  <a:srgbClr val="CCCCCC"/>
-                </a:solidFill>
-                <a:latin typeface="Courier New" pitchFamily="34" charset="0"/>
-                <a:ea typeface="Courier New" pitchFamily="34" charset="-122"/>
-                <a:cs typeface="Courier New" pitchFamily="34" charset="-120"/>
-              </a:rPr>
               <a:t>]</a:t>
+            </a:r>
+            <a:r>
+              <a:rPr lang="en-US" sz="1050" dirty="0">
+                <a:solidFill>
+                  <a:srgbClr val="CCCCCC"/>
+                </a:solidFill>
+                <a:latin typeface="Courier New" pitchFamily="34" charset="0"/>
+                <a:ea typeface="Courier New" pitchFamily="34" charset="-122"/>
+                <a:cs typeface="Courier New" pitchFamily="34" charset="-120"/>
+              </a:rPr>
+              <a:t>,</a:t>
             </a:r>
             <a:endParaRPr lang="en-US" sz="1050" dirty="0"/>
           </a:p>
@@ -13000,18 +13394,18 @@
                 <a:ea typeface="Courier New" pitchFamily="34" charset="-122"/>
                 <a:cs typeface="Courier New" pitchFamily="34" charset="-120"/>
               </a:rPr>
-              <a:t>  </a:t>
-            </a:r>
-            <a:r>
-              <a:rPr lang="en-US" sz="1050" dirty="0">
-                <a:solidFill>
-                  <a:srgbClr val="4EC9B0"/>
-                </a:solidFill>
-                <a:latin typeface="Courier New" pitchFamily="34" charset="0"/>
-                <a:ea typeface="Courier New" pitchFamily="34" charset="-122"/>
-                <a:cs typeface="Courier New" pitchFamily="34" charset="-120"/>
-              </a:rPr>
-              <a:t>@UI.selectionField</a:t>
+              <a:t>         </a:t>
+            </a:r>
+            <a:r>
+              <a:rPr lang="en-US" sz="1050" dirty="0">
+                <a:solidFill>
+                  <a:srgbClr val="CCCCCC"/>
+                </a:solidFill>
+                <a:latin typeface="Courier New" pitchFamily="34" charset="0"/>
+                <a:ea typeface="Courier New" pitchFamily="34" charset="-122"/>
+                <a:cs typeface="Courier New" pitchFamily="34" charset="-120"/>
+              </a:rPr>
+              <a:t>identification</a:t>
             </a:r>
             <a:r>
               <a:rPr lang="en-US" sz="1050" dirty="0">
@@ -13055,6 +13449,17 @@
                 <a:ea typeface="Courier New" pitchFamily="34" charset="-122"/>
                 <a:cs typeface="Courier New" pitchFamily="34" charset="-120"/>
               </a:rPr>
+              <a:t>{</a:t>
+            </a:r>
+            <a:r>
+              <a:rPr lang="en-US" sz="1050" dirty="0">
+                <a:solidFill>
+                  <a:srgbClr val="CCCCCC"/>
+                </a:solidFill>
+                <a:latin typeface="Courier New" pitchFamily="34" charset="0"/>
+                <a:ea typeface="Courier New" pitchFamily="34" charset="-122"/>
+                <a:cs typeface="Courier New" pitchFamily="34" charset="-120"/>
+              </a:rPr>
               <a:t> </a:t>
             </a:r>
             <a:r>
@@ -13066,7 +13471,18 @@
                 <a:ea typeface="Courier New" pitchFamily="34" charset="-122"/>
                 <a:cs typeface="Courier New" pitchFamily="34" charset="-120"/>
               </a:rPr>
-              <a:t>{</a:t>
+              <a:t>position</a:t>
+            </a:r>
+            <a:r>
+              <a:rPr lang="en-US" sz="1050" dirty="0">
+                <a:solidFill>
+                  <a:srgbClr val="CCCCCC"/>
+                </a:solidFill>
+                <a:latin typeface="Courier New" pitchFamily="34" charset="0"/>
+                <a:ea typeface="Courier New" pitchFamily="34" charset="-122"/>
+                <a:cs typeface="Courier New" pitchFamily="34" charset="-120"/>
+              </a:rPr>
+              <a:t>:</a:t>
             </a:r>
             <a:r>
               <a:rPr lang="en-US" sz="1050" dirty="0">
@@ -13082,24 +13498,13 @@
             <a:r>
               <a:rPr lang="en-US" sz="1050" dirty="0">
                 <a:solidFill>
-                  <a:srgbClr val="CCCCCC"/>
-                </a:solidFill>
-                <a:latin typeface="Courier New" pitchFamily="34" charset="0"/>
-                <a:ea typeface="Courier New" pitchFamily="34" charset="-122"/>
-                <a:cs typeface="Courier New" pitchFamily="34" charset="-120"/>
-              </a:rPr>
-              <a:t>position</a:t>
-            </a:r>
-            <a:r>
-              <a:rPr lang="en-US" sz="1050" dirty="0">
-                <a:solidFill>
-                  <a:srgbClr val="CCCCCC"/>
-                </a:solidFill>
-                <a:latin typeface="Courier New" pitchFamily="34" charset="0"/>
-                <a:ea typeface="Courier New" pitchFamily="34" charset="-122"/>
-                <a:cs typeface="Courier New" pitchFamily="34" charset="-120"/>
-              </a:rPr>
-              <a:t>:</a:t>
+                  <a:srgbClr val="B5CEA8"/>
+                </a:solidFill>
+                <a:latin typeface="Courier New" pitchFamily="34" charset="0"/>
+                <a:ea typeface="Courier New" pitchFamily="34" charset="-122"/>
+                <a:cs typeface="Courier New" pitchFamily="34" charset="-120"/>
+              </a:rPr>
+              <a:t>10</a:t>
             </a:r>
             <a:r>
               <a:rPr lang="en-US" sz="1050" dirty="0">
@@ -13115,13 +13520,24 @@
             <a:r>
               <a:rPr lang="en-US" sz="1050" dirty="0">
                 <a:solidFill>
-                  <a:srgbClr val="B5CEA8"/>
-                </a:solidFill>
-                <a:latin typeface="Courier New" pitchFamily="34" charset="0"/>
-                <a:ea typeface="Courier New" pitchFamily="34" charset="-122"/>
-                <a:cs typeface="Courier New" pitchFamily="34" charset="-120"/>
-              </a:rPr>
-              <a:t>10</a:t>
+                  <a:srgbClr val="CCCCCC"/>
+                </a:solidFill>
+                <a:latin typeface="Courier New" pitchFamily="34" charset="0"/>
+                <a:ea typeface="Courier New" pitchFamily="34" charset="-122"/>
+                <a:cs typeface="Courier New" pitchFamily="34" charset="-120"/>
+              </a:rPr>
+              <a:t>}</a:t>
+            </a:r>
+            <a:r>
+              <a:rPr lang="en-US" sz="1050" dirty="0">
+                <a:solidFill>
+                  <a:srgbClr val="CCCCCC"/>
+                </a:solidFill>
+                <a:latin typeface="Courier New" pitchFamily="34" charset="0"/>
+                <a:ea typeface="Courier New" pitchFamily="34" charset="-122"/>
+                <a:cs typeface="Courier New" pitchFamily="34" charset="-120"/>
+              </a:rPr>
+              <a:t>]</a:t>
             </a:r>
             <a:r>
               <a:rPr lang="en-US" sz="1050" dirty="0">
@@ -13144,28 +13560,6 @@
                 <a:cs typeface="Courier New" pitchFamily="34" charset="-120"/>
               </a:rPr>
               <a:t>}</a:t>
-            </a:r>
-            <a:r>
-              <a:rPr lang="en-US" sz="1050" dirty="0">
-                <a:solidFill>
-                  <a:srgbClr val="CCCCCC"/>
-                </a:solidFill>
-                <a:latin typeface="Courier New" pitchFamily="34" charset="0"/>
-                <a:ea typeface="Courier New" pitchFamily="34" charset="-122"/>
-                <a:cs typeface="Courier New" pitchFamily="34" charset="-120"/>
-              </a:rPr>
-              <a:t> </a:t>
-            </a:r>
-            <a:r>
-              <a:rPr lang="en-US" sz="1050" dirty="0">
-                <a:solidFill>
-                  <a:srgbClr val="CCCCCC"/>
-                </a:solidFill>
-                <a:latin typeface="Courier New" pitchFamily="34" charset="0"/>
-                <a:ea typeface="Courier New" pitchFamily="34" charset="-122"/>
-                <a:cs typeface="Courier New" pitchFamily="34" charset="-120"/>
-              </a:rPr>
-              <a:t>]</a:t>
             </a:r>
             <a:endParaRPr lang="en-US" sz="1050" dirty="0"/>
           </a:p>
@@ -13196,7 +13590,7 @@
                 <a:ea typeface="Courier New" pitchFamily="34" charset="-122"/>
                 <a:cs typeface="Courier New" pitchFamily="34" charset="-120"/>
               </a:rPr>
-              <a:t>CarrierID</a:t>
+              <a:t>Sku</a:t>
             </a:r>
             <a:r>
               <a:rPr lang="en-US" sz="1050" dirty="0">
@@ -13238,7 +13632,7 @@
                 <a:ea typeface="Courier New" pitchFamily="34" charset="-122"/>
                 <a:cs typeface="Courier New" pitchFamily="34" charset="-120"/>
               </a:rPr>
-              <a:t>@UI.identification</a:t>
+              <a:t>@UI.selectionField</a:t>
             </a:r>
             <a:r>
               <a:rPr lang="en-US" sz="1050" dirty="0">
@@ -13282,6 +13676,17 @@
                 <a:ea typeface="Courier New" pitchFamily="34" charset="-122"/>
                 <a:cs typeface="Courier New" pitchFamily="34" charset="-120"/>
               </a:rPr>
+              <a:t>{</a:t>
+            </a:r>
+            <a:r>
+              <a:rPr lang="en-US" sz="1050" dirty="0">
+                <a:solidFill>
+                  <a:srgbClr val="CCCCCC"/>
+                </a:solidFill>
+                <a:latin typeface="Courier New" pitchFamily="34" charset="0"/>
+                <a:ea typeface="Courier New" pitchFamily="34" charset="-122"/>
+                <a:cs typeface="Courier New" pitchFamily="34" charset="-120"/>
+              </a:rPr>
               <a:t> </a:t>
             </a:r>
             <a:r>
@@ -13293,7 +13698,18 @@
                 <a:ea typeface="Courier New" pitchFamily="34" charset="-122"/>
                 <a:cs typeface="Courier New" pitchFamily="34" charset="-120"/>
               </a:rPr>
-              <a:t>{</a:t>
+              <a:t>position</a:t>
+            </a:r>
+            <a:r>
+              <a:rPr lang="en-US" sz="1050" dirty="0">
+                <a:solidFill>
+                  <a:srgbClr val="CCCCCC"/>
+                </a:solidFill>
+                <a:latin typeface="Courier New" pitchFamily="34" charset="0"/>
+                <a:ea typeface="Courier New" pitchFamily="34" charset="-122"/>
+                <a:cs typeface="Courier New" pitchFamily="34" charset="-120"/>
+              </a:rPr>
+              <a:t>:</a:t>
             </a:r>
             <a:r>
               <a:rPr lang="en-US" sz="1050" dirty="0">
@@ -13309,24 +13725,13 @@
             <a:r>
               <a:rPr lang="en-US" sz="1050" dirty="0">
                 <a:solidFill>
-                  <a:srgbClr val="CCCCCC"/>
-                </a:solidFill>
-                <a:latin typeface="Courier New" pitchFamily="34" charset="0"/>
-                <a:ea typeface="Courier New" pitchFamily="34" charset="-122"/>
-                <a:cs typeface="Courier New" pitchFamily="34" charset="-120"/>
-              </a:rPr>
-              <a:t>position</a:t>
-            </a:r>
-            <a:r>
-              <a:rPr lang="en-US" sz="1050" dirty="0">
-                <a:solidFill>
-                  <a:srgbClr val="CCCCCC"/>
-                </a:solidFill>
-                <a:latin typeface="Courier New" pitchFamily="34" charset="0"/>
-                <a:ea typeface="Courier New" pitchFamily="34" charset="-122"/>
-                <a:cs typeface="Courier New" pitchFamily="34" charset="-120"/>
-              </a:rPr>
-              <a:t>:</a:t>
+                  <a:srgbClr val="B5CEA8"/>
+                </a:solidFill>
+                <a:latin typeface="Courier New" pitchFamily="34" charset="0"/>
+                <a:ea typeface="Courier New" pitchFamily="34" charset="-122"/>
+                <a:cs typeface="Courier New" pitchFamily="34" charset="-120"/>
+              </a:rPr>
+              <a:t>30</a:t>
             </a:r>
             <a:r>
               <a:rPr lang="en-US" sz="1050" dirty="0">
@@ -13342,28 +13747,6 @@
             <a:r>
               <a:rPr lang="en-US" sz="1050" dirty="0">
                 <a:solidFill>
-                  <a:srgbClr val="B5CEA8"/>
-                </a:solidFill>
-                <a:latin typeface="Courier New" pitchFamily="34" charset="0"/>
-                <a:ea typeface="Courier New" pitchFamily="34" charset="-122"/>
-                <a:cs typeface="Courier New" pitchFamily="34" charset="-120"/>
-              </a:rPr>
-              <a:t>20</a:t>
-            </a:r>
-            <a:r>
-              <a:rPr lang="en-US" sz="1050" dirty="0">
-                <a:solidFill>
-                  <a:srgbClr val="CCCCCC"/>
-                </a:solidFill>
-                <a:latin typeface="Courier New" pitchFamily="34" charset="0"/>
-                <a:ea typeface="Courier New" pitchFamily="34" charset="-122"/>
-                <a:cs typeface="Courier New" pitchFamily="34" charset="-120"/>
-              </a:rPr>
-              <a:t> </a:t>
-            </a:r>
-            <a:r>
-              <a:rPr lang="en-US" sz="1050" dirty="0">
-                <a:solidFill>
                   <a:srgbClr val="CCCCCC"/>
                 </a:solidFill>
                 <a:latin typeface="Courier New" pitchFamily="34" charset="0"/>
@@ -13371,17 +13754,6 @@
                 <a:cs typeface="Courier New" pitchFamily="34" charset="-120"/>
               </a:rPr>
               <a:t>}</a:t>
-            </a:r>
-            <a:r>
-              <a:rPr lang="en-US" sz="1050" dirty="0">
-                <a:solidFill>
-                  <a:srgbClr val="CCCCCC"/>
-                </a:solidFill>
-                <a:latin typeface="Courier New" pitchFamily="34" charset="0"/>
-                <a:ea typeface="Courier New" pitchFamily="34" charset="-122"/>
-                <a:cs typeface="Courier New" pitchFamily="34" charset="-120"/>
-              </a:rPr>
-              <a:t> </a:t>
             </a:r>
             <a:r>
               <a:rPr lang="en-US" sz="1050" dirty="0">
@@ -13423,7 +13795,7 @@
                 <a:ea typeface="Courier New" pitchFamily="34" charset="-122"/>
                 <a:cs typeface="Courier New" pitchFamily="34" charset="-120"/>
               </a:rPr>
-              <a:t>ConnectionID</a:t>
+              <a:t>Categoria</a:t>
             </a:r>
             <a:r>
               <a:rPr lang="en-US" sz="1050" dirty="0">
@@ -13529,7 +13901,7 @@
                 <a:ea typeface="Courier New" pitchFamily="34" charset="-122"/>
                 <a:cs typeface="Courier New" pitchFamily="34" charset="-120"/>
               </a:rPr>
-              <a:t>LocalLastChangedAt</a:t>
+              <a:t>ItemUUID</a:t>
             </a:r>
             <a:r>
               <a:rPr lang="en-US" sz="1050" dirty="0">
@@ -14408,7 +14780,7 @@
                   <a:srgbClr val="FFFFFF"/>
                 </a:solidFill>
               </a:rPr>
-              <a:t>Módulo 04 (ordem recomendada) ou Módulo 02: Dicionário e CDS em profundidade.</a:t>
+              <a:t>Módulo 02: Programação ABAP intermediária (S4D401), o próximo curso da jornada.</a:t>
             </a:r>
             <a:endParaRPr lang="en-US" sz="1500" dirty="0"/>
           </a:p>
@@ -14502,7 +14874,7 @@
         </p:blipFill>
         <p:spPr>
           <a:xfrm>
-            <a:off x="6355080" y="2926080"/>
+            <a:off x="822960" y="3886200"/>
             <a:ext cx="256032" cy="256032"/>
           </a:xfrm>
           <a:prstGeom prst="rect">
@@ -14526,7 +14898,7 @@
         </p:blipFill>
         <p:spPr>
           <a:xfrm>
-            <a:off x="822960" y="3886200"/>
+            <a:off x="6355080" y="2926080"/>
             <a:ext cx="256032" cy="256032"/>
           </a:xfrm>
           <a:prstGeom prst="rect">
@@ -14550,8 +14922,8 @@
         </p:blipFill>
         <p:spPr>
           <a:xfrm>
-            <a:off x="960120" y="5541264"/>
-            <a:ext cx="365760" cy="365760"/>
+            <a:off x="6355080" y="3886200"/>
+            <a:ext cx="256032" cy="256032"/>
           </a:xfrm>
           <a:prstGeom prst="rect">
             <a:avLst/>
@@ -14574,8 +14946,8 @@
         </p:blipFill>
         <p:spPr>
           <a:xfrm>
-            <a:off x="6355080" y="3886200"/>
-            <a:ext cx="256032" cy="256032"/>
+            <a:off x="960120" y="5541264"/>
+            <a:ext cx="365760" cy="365760"/>
           </a:xfrm>
           <a:prstGeom prst="rect">
             <a:avLst/>
@@ -16097,7 +16469,7 @@
                   <a:srgbClr val="1D2D3E"/>
                 </a:solidFill>
               </a:rPr>
-              <a:t>geramos um serviço OData de UI para conexões de voo, garantimos a chave semântica com uma validação e ajustamos o app Fiori.</a:t>
+              <a:t>seguimos o BO Item de estoque do projeto Pedidos de Compras: chave técnica UUID, o SKU garantido como chave semântica por uma validação e o app Fiori ajustado por anotações.</a:t>
             </a:r>
             <a:endParaRPr lang="en-US" sz="1400" dirty="0"/>
           </a:p>
@@ -16167,7 +16539,7 @@
         </p:blipFill>
         <p:spPr>
           <a:xfrm>
-            <a:off x="8275091" y="1847088"/>
+            <a:off x="2636444" y="3858768"/>
             <a:ext cx="347472" cy="347472"/>
           </a:xfrm>
           <a:prstGeom prst="rect">
@@ -16215,7 +16587,7 @@
         </p:blipFill>
         <p:spPr>
           <a:xfrm>
-            <a:off x="2636444" y="3858768"/>
+            <a:off x="5455768" y="3858768"/>
             <a:ext cx="347472" cy="347472"/>
           </a:xfrm>
           <a:prstGeom prst="rect">
@@ -16239,7 +16611,7 @@
         </p:blipFill>
         <p:spPr>
           <a:xfrm>
-            <a:off x="5455768" y="3858768"/>
+            <a:off x="11094415" y="3858768"/>
             <a:ext cx="347472" cy="347472"/>
           </a:xfrm>
           <a:prstGeom prst="rect">
@@ -16263,7 +16635,7 @@
         </p:blipFill>
         <p:spPr>
           <a:xfrm>
-            <a:off x="8275091" y="3858768"/>
+            <a:off x="8275091" y="1847088"/>
             <a:ext cx="347472" cy="347472"/>
           </a:xfrm>
           <a:prstGeom prst="rect">
@@ -16287,7 +16659,7 @@
         </p:blipFill>
         <p:spPr>
           <a:xfrm>
-            <a:off x="11094415" y="3858768"/>
+            <a:off x="8275091" y="3858768"/>
             <a:ext cx="347472" cy="347472"/>
           </a:xfrm>
           <a:prstGeom prst="rect">
@@ -18761,7 +19133,7 @@
         </p:blipFill>
         <p:spPr>
           <a:xfrm>
-            <a:off x="2077669" y="2084832"/>
+            <a:off x="5912968" y="2084832"/>
             <a:ext cx="365760" cy="365760"/>
           </a:xfrm>
           <a:prstGeom prst="rect">
@@ -18785,7 +19157,7 @@
         </p:blipFill>
         <p:spPr>
           <a:xfrm>
-            <a:off x="9748266" y="2084832"/>
+            <a:off x="2077669" y="2084832"/>
             <a:ext cx="365760" cy="365760"/>
           </a:xfrm>
           <a:prstGeom prst="rect">
@@ -18809,8 +19181,8 @@
         </p:blipFill>
         <p:spPr>
           <a:xfrm>
-            <a:off x="5912968" y="2084832"/>
-            <a:ext cx="365760" cy="365760"/>
+            <a:off x="820034" y="3928994"/>
+            <a:ext cx="225308" cy="225308"/>
           </a:xfrm>
           <a:prstGeom prst="rect">
             <a:avLst/>
@@ -18857,8 +19229,8 @@
         </p:blipFill>
         <p:spPr>
           <a:xfrm>
-            <a:off x="820034" y="3928994"/>
-            <a:ext cx="225308" cy="225308"/>
+            <a:off x="9748266" y="2084832"/>
+            <a:ext cx="365760" cy="365760"/>
           </a:xfrm>
           <a:prstGeom prst="rect">
             <a:avLst/>
@@ -20902,7 +21274,7 @@
                   <a:srgbClr val="FFFFFF"/>
                 </a:solidFill>
               </a:rPr>
-              <a:t>zconnection.tabl.abap</a:t>
+              <a:t>zta_pc_item.tabl.abap</a:t>
             </a:r>
             <a:endParaRPr lang="en-US" sz="950" dirty="0"/>
           </a:p>
@@ -20938,7 +21310,7 @@
                   <a:srgbClr val="9DA5B4"/>
                 </a:solidFill>
               </a:rPr>
-              <a:t>ZS4D400_##_RAP › ZCONNECTION</a:t>
+              <a:t>ZAVBS_PC_ESTOQUE › ZTA_PC_ITEM (simplificada)</a:t>
             </a:r>
             <a:endParaRPr lang="en-US" sz="850" dirty="0"/>
           </a:p>
@@ -21366,7 +21738,7 @@
                 <a:ea typeface="Courier New" pitchFamily="34" charset="-122"/>
                 <a:cs typeface="Courier New" pitchFamily="34" charset="-120"/>
               </a:rPr>
-              <a:t>'Flight connections'</a:t>
+              <a:t>'Tabela de Item'</a:t>
             </a:r>
             <a:endParaRPr lang="en-US" sz="950" dirty="0"/>
           </a:p>
@@ -21558,7 +21930,7 @@
                 <a:ea typeface="Courier New" pitchFamily="34" charset="-122"/>
                 <a:cs typeface="Courier New" pitchFamily="34" charset="-120"/>
               </a:rPr>
-              <a:t>zconnection</a:t>
+              <a:t>zta_pc_item</a:t>
             </a:r>
             <a:r>
               <a:rPr lang="en-US" sz="950" dirty="0">
@@ -21807,7 +22179,7 @@
                 <a:ea typeface="Courier New" pitchFamily="34" charset="-122"/>
                 <a:cs typeface="Courier New" pitchFamily="34" charset="-120"/>
               </a:rPr>
-              <a:t>uuid</a:t>
+              <a:t>item_uuid</a:t>
             </a:r>
             <a:r>
               <a:rPr lang="en-US" sz="950" dirty="0">
@@ -21818,7 +22190,7 @@
                 <a:ea typeface="Courier New" pitchFamily="34" charset="-122"/>
                 <a:cs typeface="Courier New" pitchFamily="34" charset="-120"/>
               </a:rPr>
-              <a:t>              </a:t>
+              <a:t>         </a:t>
             </a:r>
             <a:r>
               <a:rPr lang="en-US" sz="950" dirty="0">
@@ -21937,7 +22309,7 @@
                 <a:ea typeface="Courier New" pitchFamily="34" charset="-122"/>
                 <a:cs typeface="Courier New" pitchFamily="34" charset="-120"/>
               </a:rPr>
-              <a:t>carrier_id</a:t>
+              <a:t>sku</a:t>
             </a:r>
             <a:r>
               <a:rPr lang="en-US" sz="950" dirty="0">
@@ -21948,7 +22320,7 @@
                 <a:ea typeface="Courier New" pitchFamily="34" charset="-122"/>
                 <a:cs typeface="Courier New" pitchFamily="34" charset="-120"/>
               </a:rPr>
-              <a:t>            </a:t>
+              <a:t>                   </a:t>
             </a:r>
             <a:r>
               <a:rPr lang="en-US" sz="950" dirty="0">
@@ -21981,7 +22353,62 @@
                 <a:ea typeface="Courier New" pitchFamily="34" charset="-122"/>
                 <a:cs typeface="Courier New" pitchFamily="34" charset="-120"/>
               </a:rPr>
-              <a:t>/dmo/carrier_id</a:t>
+              <a:t>abap</a:t>
+            </a:r>
+            <a:r>
+              <a:rPr lang="en-US" sz="950" dirty="0">
+                <a:solidFill>
+                  <a:srgbClr val="CCCCCC"/>
+                </a:solidFill>
+                <a:latin typeface="Courier New" pitchFamily="34" charset="0"/>
+                <a:ea typeface="Courier New" pitchFamily="34" charset="-122"/>
+                <a:cs typeface="Courier New" pitchFamily="34" charset="-120"/>
+              </a:rPr>
+              <a:t>.</a:t>
+            </a:r>
+            <a:r>
+              <a:rPr lang="en-US" sz="950" dirty="0">
+                <a:solidFill>
+                  <a:srgbClr val="DCDCAA"/>
+                </a:solidFill>
+                <a:latin typeface="Courier New" pitchFamily="34" charset="0"/>
+                <a:ea typeface="Courier New" pitchFamily="34" charset="-122"/>
+                <a:cs typeface="Courier New" pitchFamily="34" charset="-120"/>
+              </a:rPr>
+              <a:t>char</a:t>
+            </a:r>
+            <a:r>
+              <a:rPr lang="en-US" sz="950" dirty="0">
+                <a:solidFill>
+                  <a:srgbClr val="CCCCCC"/>
+                </a:solidFill>
+                <a:latin typeface="Courier New" pitchFamily="34" charset="0"/>
+                <a:ea typeface="Courier New" pitchFamily="34" charset="-122"/>
+                <a:cs typeface="Courier New" pitchFamily="34" charset="-120"/>
+              </a:rPr>
+              <a:t>(</a:t>
+            </a:r>
+            <a:r>
+              <a:rPr lang="en-US" sz="950" dirty="0">
+                <a:solidFill>
+                  <a:srgbClr val="B5CEA8"/>
+                </a:solidFill>
+                <a:latin typeface="Courier New" pitchFamily="34" charset="0"/>
+                <a:ea typeface="Courier New" pitchFamily="34" charset="-122"/>
+                <a:cs typeface="Courier New" pitchFamily="34" charset="-120"/>
+              </a:rPr>
+              <a:t>21</a:t>
+            </a:r>
+            <a:r>
+              <a:rPr lang="en-US" sz="950" dirty="0">
+                <a:solidFill>
+                  <a:srgbClr val="CCCCCC"/>
+                </a:solidFill>
+                <a:latin typeface="Courier New" pitchFamily="34" charset="0"/>
+                <a:ea typeface="Courier New" pitchFamily="34" charset="-122"/>
+                <a:cs typeface="Courier New" pitchFamily="34" charset="-120"/>
+              </a:rPr>
+              <a:t>)</a:t>
             </a:r>
             <a:r>
               <a:rPr lang="en-US" sz="950" dirty="0">
@@ -22023,7 +22450,7 @@
                 <a:ea typeface="Courier New" pitchFamily="34" charset="-122"/>
                 <a:cs typeface="Courier New" pitchFamily="34" charset="-120"/>
               </a:rPr>
-              <a:t>connection_id</a:t>
+              <a:t>nome</a:t>
             </a:r>
             <a:r>
               <a:rPr lang="en-US" sz="950" dirty="0">
@@ -22034,7 +22461,7 @@
                 <a:ea typeface="Courier New" pitchFamily="34" charset="-122"/>
                 <a:cs typeface="Courier New" pitchFamily="34" charset="-120"/>
               </a:rPr>
-              <a:t>         </a:t>
+              <a:t>                  </a:t>
             </a:r>
             <a:r>
               <a:rPr lang="en-US" sz="950" dirty="0">
@@ -22067,7 +22494,62 @@
                 <a:ea typeface="Courier New" pitchFamily="34" charset="-122"/>
                 <a:cs typeface="Courier New" pitchFamily="34" charset="-120"/>
               </a:rPr>
-              <a:t>/dmo/connection_id</a:t>
+              <a:t>abap</a:t>
+            </a:r>
+            <a:r>
+              <a:rPr lang="en-US" sz="950" dirty="0">
+                <a:solidFill>
+                  <a:srgbClr val="CCCCCC"/>
+                </a:solidFill>
+                <a:latin typeface="Courier New" pitchFamily="34" charset="0"/>
+                <a:ea typeface="Courier New" pitchFamily="34" charset="-122"/>
+                <a:cs typeface="Courier New" pitchFamily="34" charset="-120"/>
+              </a:rPr>
+              <a:t>.</a:t>
+            </a:r>
+            <a:r>
+              <a:rPr lang="en-US" sz="950" dirty="0">
+                <a:solidFill>
+                  <a:srgbClr val="DCDCAA"/>
+                </a:solidFill>
+                <a:latin typeface="Courier New" pitchFamily="34" charset="0"/>
+                <a:ea typeface="Courier New" pitchFamily="34" charset="-122"/>
+                <a:cs typeface="Courier New" pitchFamily="34" charset="-120"/>
+              </a:rPr>
+              <a:t>char</a:t>
+            </a:r>
+            <a:r>
+              <a:rPr lang="en-US" sz="950" dirty="0">
+                <a:solidFill>
+                  <a:srgbClr val="CCCCCC"/>
+                </a:solidFill>
+                <a:latin typeface="Courier New" pitchFamily="34" charset="0"/>
+                <a:ea typeface="Courier New" pitchFamily="34" charset="-122"/>
+                <a:cs typeface="Courier New" pitchFamily="34" charset="-120"/>
+              </a:rPr>
+              <a:t>(</a:t>
+            </a:r>
+            <a:r>
+              <a:rPr lang="en-US" sz="950" dirty="0">
+                <a:solidFill>
+                  <a:srgbClr val="B5CEA8"/>
+                </a:solidFill>
+                <a:latin typeface="Courier New" pitchFamily="34" charset="0"/>
+                <a:ea typeface="Courier New" pitchFamily="34" charset="-122"/>
+                <a:cs typeface="Courier New" pitchFamily="34" charset="-120"/>
+              </a:rPr>
+              <a:t>120</a:t>
+            </a:r>
+            <a:r>
+              <a:rPr lang="en-US" sz="950" dirty="0">
+                <a:solidFill>
+                  <a:srgbClr val="CCCCCC"/>
+                </a:solidFill>
+                <a:latin typeface="Courier New" pitchFamily="34" charset="0"/>
+                <a:ea typeface="Courier New" pitchFamily="34" charset="-122"/>
+                <a:cs typeface="Courier New" pitchFamily="34" charset="-120"/>
+              </a:rPr>
+              <a:t>)</a:t>
             </a:r>
             <a:r>
               <a:rPr lang="en-US" sz="950" dirty="0">
@@ -22109,7 +22591,7 @@
                 <a:ea typeface="Courier New" pitchFamily="34" charset="-122"/>
                 <a:cs typeface="Courier New" pitchFamily="34" charset="-120"/>
               </a:rPr>
-              <a:t>airport_from_id</a:t>
+              <a:t>categoria</a:t>
             </a:r>
             <a:r>
               <a:rPr lang="en-US" sz="950" dirty="0">
@@ -22120,7 +22602,7 @@
                 <a:ea typeface="Courier New" pitchFamily="34" charset="-122"/>
                 <a:cs typeface="Courier New" pitchFamily="34" charset="-120"/>
               </a:rPr>
-              <a:t>       </a:t>
+              <a:t>             </a:t>
             </a:r>
             <a:r>
               <a:rPr lang="en-US" sz="950" dirty="0">
@@ -22153,7 +22635,62 @@
                 <a:ea typeface="Courier New" pitchFamily="34" charset="-122"/>
                 <a:cs typeface="Courier New" pitchFamily="34" charset="-120"/>
               </a:rPr>
-              <a:t>/dmo/airport_from_id</a:t>
+              <a:t>abap</a:t>
+            </a:r>
+            <a:r>
+              <a:rPr lang="en-US" sz="950" dirty="0">
+                <a:solidFill>
+                  <a:srgbClr val="CCCCCC"/>
+                </a:solidFill>
+                <a:latin typeface="Courier New" pitchFamily="34" charset="0"/>
+                <a:ea typeface="Courier New" pitchFamily="34" charset="-122"/>
+                <a:cs typeface="Courier New" pitchFamily="34" charset="-120"/>
+              </a:rPr>
+              <a:t>.</a:t>
+            </a:r>
+            <a:r>
+              <a:rPr lang="en-US" sz="950" dirty="0">
+                <a:solidFill>
+                  <a:srgbClr val="DCDCAA"/>
+                </a:solidFill>
+                <a:latin typeface="Courier New" pitchFamily="34" charset="0"/>
+                <a:ea typeface="Courier New" pitchFamily="34" charset="-122"/>
+                <a:cs typeface="Courier New" pitchFamily="34" charset="-120"/>
+              </a:rPr>
+              <a:t>char</a:t>
+            </a:r>
+            <a:r>
+              <a:rPr lang="en-US" sz="950" dirty="0">
+                <a:solidFill>
+                  <a:srgbClr val="CCCCCC"/>
+                </a:solidFill>
+                <a:latin typeface="Courier New" pitchFamily="34" charset="0"/>
+                <a:ea typeface="Courier New" pitchFamily="34" charset="-122"/>
+                <a:cs typeface="Courier New" pitchFamily="34" charset="-120"/>
+              </a:rPr>
+              <a:t>(</a:t>
+            </a:r>
+            <a:r>
+              <a:rPr lang="en-US" sz="950" dirty="0">
+                <a:solidFill>
+                  <a:srgbClr val="B5CEA8"/>
+                </a:solidFill>
+                <a:latin typeface="Courier New" pitchFamily="34" charset="0"/>
+                <a:ea typeface="Courier New" pitchFamily="34" charset="-122"/>
+                <a:cs typeface="Courier New" pitchFamily="34" charset="-120"/>
+              </a:rPr>
+              <a:t>30</a:t>
+            </a:r>
+            <a:r>
+              <a:rPr lang="en-US" sz="950" dirty="0">
+                <a:solidFill>
+                  <a:srgbClr val="CCCCCC"/>
+                </a:solidFill>
+                <a:latin typeface="Courier New" pitchFamily="34" charset="0"/>
+                <a:ea typeface="Courier New" pitchFamily="34" charset="-122"/>
+                <a:cs typeface="Courier New" pitchFamily="34" charset="-120"/>
+              </a:rPr>
+              <a:t>)</a:t>
             </a:r>
             <a:r>
               <a:rPr lang="en-US" sz="950" dirty="0">
@@ -22195,7 +22732,7 @@
                 <a:ea typeface="Courier New" pitchFamily="34" charset="-122"/>
                 <a:cs typeface="Courier New" pitchFamily="34" charset="-120"/>
               </a:rPr>
-              <a:t>airport_to_id</a:t>
+              <a:t>qtde_estoque</a:t>
             </a:r>
             <a:r>
               <a:rPr lang="en-US" sz="950" dirty="0">
@@ -22206,7 +22743,7 @@
                 <a:ea typeface="Courier New" pitchFamily="34" charset="-122"/>
                 <a:cs typeface="Courier New" pitchFamily="34" charset="-120"/>
               </a:rPr>
-              <a:t>         </a:t>
+              <a:t>          </a:t>
             </a:r>
             <a:r>
               <a:rPr lang="en-US" sz="950" dirty="0">
@@ -22239,7 +22776,29 @@
                 <a:ea typeface="Courier New" pitchFamily="34" charset="-122"/>
                 <a:cs typeface="Courier New" pitchFamily="34" charset="-120"/>
               </a:rPr>
-              <a:t>/dmo/airport_to_id</a:t>
+              <a:t>abap</a:t>
+            </a:r>
+            <a:r>
+              <a:rPr lang="en-US" sz="950" dirty="0">
+                <a:solidFill>
+                  <a:srgbClr val="CCCCCC"/>
+                </a:solidFill>
+                <a:latin typeface="Courier New" pitchFamily="34" charset="0"/>
+                <a:ea typeface="Courier New" pitchFamily="34" charset="-122"/>
+                <a:cs typeface="Courier New" pitchFamily="34" charset="-120"/>
+              </a:rPr>
+              <a:t>.</a:t>
+            </a:r>
+            <a:r>
+              <a:rPr lang="en-US" sz="950" dirty="0">
+                <a:solidFill>
+                  <a:srgbClr val="CCCCCC"/>
+                </a:solidFill>
+                <a:latin typeface="Courier New" pitchFamily="34" charset="0"/>
+                <a:ea typeface="Courier New" pitchFamily="34" charset="-122"/>
+                <a:cs typeface="Courier New" pitchFamily="34" charset="-120"/>
+              </a:rPr>
+              <a:t>int4</a:t>
             </a:r>
             <a:r>
               <a:rPr lang="en-US" sz="950" dirty="0">
@@ -22281,7 +22840,7 @@
                 <a:ea typeface="Courier New" pitchFamily="34" charset="-122"/>
                 <a:cs typeface="Courier New" pitchFamily="34" charset="-120"/>
               </a:rPr>
-              <a:t>local_created_by</a:t>
+              <a:t>created_by</a:t>
             </a:r>
             <a:r>
               <a:rPr lang="en-US" sz="950" dirty="0">
@@ -22292,7 +22851,7 @@
                 <a:ea typeface="Courier New" pitchFamily="34" charset="-122"/>
                 <a:cs typeface="Courier New" pitchFamily="34" charset="-120"/>
               </a:rPr>
-              <a:t>      </a:t>
+              <a:t>            </a:t>
             </a:r>
             <a:r>
               <a:rPr lang="en-US" sz="950" dirty="0">
@@ -22367,7 +22926,7 @@
                 <a:ea typeface="Courier New" pitchFamily="34" charset="-122"/>
                 <a:cs typeface="Courier New" pitchFamily="34" charset="-120"/>
               </a:rPr>
-              <a:t>local_created_at</a:t>
+              <a:t>created_at</a:t>
             </a:r>
             <a:r>
               <a:rPr lang="en-US" sz="950" dirty="0">
@@ -22378,7 +22937,7 @@
                 <a:ea typeface="Courier New" pitchFamily="34" charset="-122"/>
                 <a:cs typeface="Courier New" pitchFamily="34" charset="-120"/>
               </a:rPr>
-              <a:t>      </a:t>
+              <a:t>            </a:t>
             </a:r>
             <a:r>
               <a:rPr lang="en-US" sz="950" dirty="0">
@@ -22453,7 +23012,7 @@
                 <a:ea typeface="Courier New" pitchFamily="34" charset="-122"/>
                 <a:cs typeface="Courier New" pitchFamily="34" charset="-120"/>
               </a:rPr>
-              <a:t>local_last_changed_by</a:t>
+              <a:t>last_changed_by</a:t>
             </a:r>
             <a:r>
               <a:rPr lang="en-US" sz="950" dirty="0">
@@ -22464,6 +23023,28 @@
                 <a:ea typeface="Courier New" pitchFamily="34" charset="-122"/>
                 <a:cs typeface="Courier New" pitchFamily="34" charset="-120"/>
               </a:rPr>
+              <a:t>       </a:t>
+            </a:r>
+            <a:r>
+              <a:rPr lang="en-US" sz="950" dirty="0">
+                <a:solidFill>
+                  <a:srgbClr val="CCCCCC"/>
+                </a:solidFill>
+                <a:latin typeface="Courier New" pitchFamily="34" charset="0"/>
+                <a:ea typeface="Courier New" pitchFamily="34" charset="-122"/>
+                <a:cs typeface="Courier New" pitchFamily="34" charset="-120"/>
+              </a:rPr>
+              <a:t>:</a:t>
+            </a:r>
+            <a:r>
+              <a:rPr lang="en-US" sz="950" dirty="0">
+                <a:solidFill>
+                  <a:srgbClr val="CCCCCC"/>
+                </a:solidFill>
+                <a:latin typeface="Courier New" pitchFamily="34" charset="0"/>
+                <a:ea typeface="Courier New" pitchFamily="34" charset="-122"/>
+                <a:cs typeface="Courier New" pitchFamily="34" charset="-120"/>
+              </a:rPr>
               <a:t> </a:t>
             </a:r>
             <a:r>
@@ -22475,29 +23056,7 @@
                 <a:ea typeface="Courier New" pitchFamily="34" charset="-122"/>
                 <a:cs typeface="Courier New" pitchFamily="34" charset="-120"/>
               </a:rPr>
-              <a:t>:</a:t>
-            </a:r>
-            <a:r>
-              <a:rPr lang="en-US" sz="950" dirty="0">
-                <a:solidFill>
-                  <a:srgbClr val="CCCCCC"/>
-                </a:solidFill>
-                <a:latin typeface="Courier New" pitchFamily="34" charset="0"/>
-                <a:ea typeface="Courier New" pitchFamily="34" charset="-122"/>
-                <a:cs typeface="Courier New" pitchFamily="34" charset="-120"/>
-              </a:rPr>
-              <a:t> </a:t>
-            </a:r>
-            <a:r>
-              <a:rPr lang="en-US" sz="950" dirty="0">
-                <a:solidFill>
-                  <a:srgbClr val="CCCCCC"/>
-                </a:solidFill>
-                <a:latin typeface="Courier New" pitchFamily="34" charset="0"/>
-                <a:ea typeface="Courier New" pitchFamily="34" charset="-122"/>
-                <a:cs typeface="Courier New" pitchFamily="34" charset="-120"/>
-              </a:rPr>
-              <a:t>abp_locinst_lastchange_user</a:t>
+              <a:t>abp_lastchange_user</a:t>
             </a:r>
             <a:r>
               <a:rPr lang="en-US" sz="950" dirty="0">
@@ -22539,7 +23098,7 @@
                 <a:ea typeface="Courier New" pitchFamily="34" charset="-122"/>
                 <a:cs typeface="Courier New" pitchFamily="34" charset="-120"/>
               </a:rPr>
-              <a:t>local_last_changed_at</a:t>
+              <a:t>last_changed_at</a:t>
             </a:r>
             <a:r>
               <a:rPr lang="en-US" sz="950" dirty="0">
@@ -22550,6 +23109,28 @@
                 <a:ea typeface="Courier New" pitchFamily="34" charset="-122"/>
                 <a:cs typeface="Courier New" pitchFamily="34" charset="-120"/>
               </a:rPr>
+              <a:t>       </a:t>
+            </a:r>
+            <a:r>
+              <a:rPr lang="en-US" sz="950" dirty="0">
+                <a:solidFill>
+                  <a:srgbClr val="CCCCCC"/>
+                </a:solidFill>
+                <a:latin typeface="Courier New" pitchFamily="34" charset="0"/>
+                <a:ea typeface="Courier New" pitchFamily="34" charset="-122"/>
+                <a:cs typeface="Courier New" pitchFamily="34" charset="-120"/>
+              </a:rPr>
+              <a:t>:</a:t>
+            </a:r>
+            <a:r>
+              <a:rPr lang="en-US" sz="950" dirty="0">
+                <a:solidFill>
+                  <a:srgbClr val="CCCCCC"/>
+                </a:solidFill>
+                <a:latin typeface="Courier New" pitchFamily="34" charset="0"/>
+                <a:ea typeface="Courier New" pitchFamily="34" charset="-122"/>
+                <a:cs typeface="Courier New" pitchFamily="34" charset="-120"/>
+              </a:rPr>
               <a:t> </a:t>
             </a:r>
             <a:r>
@@ -22561,29 +23142,7 @@
                 <a:ea typeface="Courier New" pitchFamily="34" charset="-122"/>
                 <a:cs typeface="Courier New" pitchFamily="34" charset="-120"/>
               </a:rPr>
-              <a:t>:</a:t>
-            </a:r>
-            <a:r>
-              <a:rPr lang="en-US" sz="950" dirty="0">
-                <a:solidFill>
-                  <a:srgbClr val="CCCCCC"/>
-                </a:solidFill>
-                <a:latin typeface="Courier New" pitchFamily="34" charset="0"/>
-                <a:ea typeface="Courier New" pitchFamily="34" charset="-122"/>
-                <a:cs typeface="Courier New" pitchFamily="34" charset="-120"/>
-              </a:rPr>
-              <a:t> </a:t>
-            </a:r>
-            <a:r>
-              <a:rPr lang="en-US" sz="950" dirty="0">
-                <a:solidFill>
-                  <a:srgbClr val="CCCCCC"/>
-                </a:solidFill>
-                <a:latin typeface="Courier New" pitchFamily="34" charset="0"/>
-                <a:ea typeface="Courier New" pitchFamily="34" charset="-122"/>
-                <a:cs typeface="Courier New" pitchFamily="34" charset="-120"/>
-              </a:rPr>
-              <a:t>abp_locinst_lastchange_tstmpl</a:t>
+              <a:t>abp_lastchange_tstmpl</a:t>
             </a:r>
             <a:r>
               <a:rPr lang="en-US" sz="950" dirty="0">
@@ -22625,7 +23184,7 @@
                 <a:ea typeface="Courier New" pitchFamily="34" charset="-122"/>
                 <a:cs typeface="Courier New" pitchFamily="34" charset="-120"/>
               </a:rPr>
-              <a:t>last_changed_at</a:t>
+              <a:t>local_last_changed_at</a:t>
             </a:r>
             <a:r>
               <a:rPr lang="en-US" sz="950" dirty="0">
@@ -22636,7 +23195,7 @@
                 <a:ea typeface="Courier New" pitchFamily="34" charset="-122"/>
                 <a:cs typeface="Courier New" pitchFamily="34" charset="-120"/>
               </a:rPr>
-              <a:t>       </a:t>
+              <a:t> </a:t>
             </a:r>
             <a:r>
               <a:rPr lang="en-US" sz="950" dirty="0">
@@ -22669,7 +23228,7 @@
                 <a:ea typeface="Courier New" pitchFamily="34" charset="-122"/>
                 <a:cs typeface="Courier New" pitchFamily="34" charset="-120"/>
               </a:rPr>
-              <a:t>abp_lastchange_tstmpl</a:t>
+              <a:t>abp_locinst_lastchange_tstmpl</a:t>
             </a:r>
             <a:r>
               <a:rPr lang="en-US" sz="950" dirty="0">
@@ -22955,7 +23514,7 @@
                   <a:srgbClr val="556B82"/>
                 </a:solidFill>
               </a:rPr>
-              <a:t>Companhia + voo também devem ser únicos: isso exige uma validação.</a:t>
+              <a:t>O SKU também deve ser único: isso exige uma validação.</a:t>
             </a:r>
             <a:endParaRPr lang="en-US" sz="1400" dirty="0"/>
           </a:p>
@@ -23064,7 +23623,26 @@
                   <a:srgbClr val="556B82"/>
                 </a:solidFill>
               </a:rPr>
-              <a:t>Quem e quando criou ou alterou; exigidos pelo gerador com esses tipos.</a:t>
+              <a:t>Quem e quando criou ou alterou; os tipos </a:t>
+            </a:r>
+            <a:r>
+              <a:rPr lang="en-US" sz="1050" dirty="0">
+                <a:solidFill>
+                  <a:srgbClr val="0064D9"/>
+                </a:solidFill>
+                <a:latin typeface="Courier New" pitchFamily="34" charset="0"/>
+                <a:ea typeface="Courier New" pitchFamily="34" charset="-122"/>
+                <a:cs typeface="Courier New" pitchFamily="34" charset="-120"/>
+              </a:rPr>
+              <a:t>abp_*</a:t>
+            </a:r>
+            <a:r>
+              <a:rPr lang="en-US" sz="1050" dirty="0">
+                <a:solidFill>
+                  <a:srgbClr val="556B82"/>
+                </a:solidFill>
+              </a:rPr>
+              <a:t> os identificam para o runtime.</a:t>
             </a:r>
             <a:endParaRPr lang="en-US" sz="1400" dirty="0"/>
           </a:p>
@@ -23159,7 +23737,7 @@
                   <a:srgbClr val="1D2D3E"/>
                 </a:solidFill>
               </a:rPr>
-              <a:t>Data elements</a:t>
+              <a:t>Moeda e preço</a:t>
             </a:r>
             <a:endParaRPr lang="en-US" sz="1400" dirty="0"/>
           </a:p>
@@ -23173,7 +23751,64 @@
                   <a:srgbClr val="556B82"/>
                 </a:solidFill>
               </a:rPr>
-              <a:t>Trazem rótulos que aparecem automaticamente no app.</a:t>
+              <a:t>Na tabela completa, </a:t>
+            </a:r>
+            <a:r>
+              <a:rPr lang="en-US" sz="1050" dirty="0">
+                <a:solidFill>
+                  <a:srgbClr val="0064D9"/>
+                </a:solidFill>
+                <a:latin typeface="Courier New" pitchFamily="34" charset="0"/>
+                <a:ea typeface="Courier New" pitchFamily="34" charset="-122"/>
+                <a:cs typeface="Courier New" pitchFamily="34" charset="-120"/>
+              </a:rPr>
+              <a:t>preco_unitario</a:t>
+            </a:r>
+            <a:r>
+              <a:rPr lang="en-US" sz="1050" dirty="0">
+                <a:solidFill>
+                  <a:srgbClr val="556B82"/>
+                </a:solidFill>
+              </a:rPr>
+              <a:t> aponta para </a:t>
+            </a:r>
+            <a:r>
+              <a:rPr lang="en-US" sz="1050" dirty="0">
+                <a:solidFill>
+                  <a:srgbClr val="0064D9"/>
+                </a:solidFill>
+                <a:latin typeface="Courier New" pitchFamily="34" charset="0"/>
+                <a:ea typeface="Courier New" pitchFamily="34" charset="-122"/>
+                <a:cs typeface="Courier New" pitchFamily="34" charset="-120"/>
+              </a:rPr>
+              <a:t>currency</a:t>
+            </a:r>
+            <a:r>
+              <a:rPr lang="en-US" sz="1050" dirty="0">
+                <a:solidFill>
+                  <a:srgbClr val="556B82"/>
+                </a:solidFill>
+              </a:rPr>
+              <a:t> com </a:t>
+            </a:r>
+            <a:r>
+              <a:rPr lang="en-US" sz="1050" dirty="0">
+                <a:solidFill>
+                  <a:srgbClr val="0064D9"/>
+                </a:solidFill>
+                <a:latin typeface="Courier New" pitchFamily="34" charset="0"/>
+                <a:ea typeface="Courier New" pitchFamily="34" charset="-122"/>
+                <a:cs typeface="Courier New" pitchFamily="34" charset="-120"/>
+              </a:rPr>
+              <a:t>@Semantics.amount</a:t>
+            </a:r>
+            <a:r>
+              <a:rPr lang="en-US" sz="1050" dirty="0">
+                <a:solidFill>
+                  <a:srgbClr val="556B82"/>
+                </a:solidFill>
+              </a:rPr>
+              <a:t>.</a:t>
             </a:r>
             <a:endParaRPr lang="en-US" sz="1400" dirty="0"/>
           </a:p>
@@ -23722,7 +24357,7 @@
         </p:blipFill>
         <p:spPr>
           <a:xfrm>
-            <a:off x="4624730" y="3036316"/>
+            <a:off x="8399069" y="3036316"/>
             <a:ext cx="256032" cy="256032"/>
           </a:xfrm>
           <a:prstGeom prst="rect">
@@ -23746,7 +24381,7 @@
         </p:blipFill>
         <p:spPr>
           <a:xfrm>
-            <a:off x="8399069" y="3036316"/>
+            <a:off x="4624730" y="3036316"/>
             <a:ext cx="256032" cy="256032"/>
           </a:xfrm>
           <a:prstGeom prst="rect">
